--- a/exports/pptx/lessons/middle-module-12-movement-of-sun/day-10-final-assessment.pptx
+++ b/exports/pptx/lessons/middle-module-12-movement-of-sun/day-10-final-assessment.pptx
@@ -4181,7 +4181,7 @@
         </p:nvSpPr>
         <p:spPr>
           <a:xfrm>
-            <a:off x="406301" y="2327672"/>
+            <a:off x="406301" y="870942"/>
             <a:ext cx="8498026" cy="213271"/>
           </a:xfrm>
           <a:prstGeom prst="rect">
@@ -4207,6 +4207,72 @@
               <a:buNone/>
             </a:pPr>
             <a:r>
+              <a:rPr lang="en-US" sz="1200" i="1" dirty="0">
+                <a:solidFill>
+                  <a:srgbClr val="1C2833"/>
+                </a:solidFill>
+                <a:latin typeface="Arial" pitchFamily="34" charset="0"/>
+                <a:ea typeface="Arial" pitchFamily="34" charset="-122"/>
+                <a:cs typeface="Arial" pitchFamily="34" charset="-120"/>
+              </a:rPr>
+              <a:t>Each row: Item · Marks · Where it lives.</a:t>
+            </a:r>
+            <a:endParaRPr lang="en-US" sz="1200" dirty="0"/>
+          </a:p>
+        </p:txBody>
+      </p:sp>
+      <p:sp>
+        <p:nvSpPr>
+          <p:cNvPr id="5" name="Text 3"/>
+          <p:cNvSpPr/>
+          <p:nvPr/>
+        </p:nvSpPr>
+        <p:spPr>
+          <a:xfrm>
+            <a:off x="634901" y="1173063"/>
+            <a:ext cx="8102798" cy="1070372"/>
+          </a:xfrm>
+          <a:prstGeom prst="rect">
+            <a:avLst/>
+          </a:prstGeom>
+          <a:noFill/>
+          <a:ln/>
+        </p:spPr>
+        <p:txBody>
+          <a:bodyPr wrap="square" lIns="0" tIns="0" rIns="0" bIns="0" rtlCol="0" anchor="t"/>
+          <a:lstStyle/>
+          <a:p>
+            <a:pPr algn="l" marL="342900" indent="-342900">
+              <a:lnSpc>
+                <a:spcPts val="1620"/>
+              </a:lnSpc>
+              <a:spcAft>
+                <a:spcPts val="300"/>
+              </a:spcAft>
+              <a:buSzPct val="100000"/>
+              <a:buChar char="•"/>
+            </a:pPr>
+            <a:r>
+              <a:rPr lang="en-US" sz="1200" b="1" dirty="0">
+                <a:solidFill>
+                  <a:srgbClr val="1C2833"/>
+                </a:solidFill>
+                <a:latin typeface="Arial" pitchFamily="34" charset="0"/>
+                <a:ea typeface="Arial" pitchFamily="34" charset="-122"/>
+                <a:cs typeface="Arial" pitchFamily="34" charset="-120"/>
+              </a:rPr>
+              <a:t>Summative quiz</a:t>
+            </a:r>
+            <a:pPr algn="l" indent="0" marL="0">
+              <a:lnSpc>
+                <a:spcPts val="1620"/>
+              </a:lnSpc>
+              <a:spcAft>
+                <a:spcPts val="300"/>
+              </a:spcAft>
+              <a:buNone/>
+            </a:pPr>
+            <a:r>
               <a:rPr lang="en-US" sz="1200" dirty="0">
                 <a:solidFill>
                   <a:srgbClr val="1C2833"/>
@@ -4215,6 +4281,286 @@
                 <a:ea typeface="Arial" pitchFamily="34" charset="-122"/>
                 <a:cs typeface="Arial" pitchFamily="34" charset="-120"/>
               </a:rPr>
+              <a:t> — 25 · </a:t>
+            </a:r>
+            <a:pPr algn="l" indent="0" marL="0">
+              <a:lnSpc>
+                <a:spcPts val="1620"/>
+              </a:lnSpc>
+              <a:spcAft>
+                <a:spcPts val="300"/>
+              </a:spcAft>
+              <a:buNone/>
+            </a:pPr>
+            <a:r>
+              <a:rPr lang="en-US" sz="1200" dirty="0">
+                <a:solidFill>
+                  <a:srgbClr val="1C2833"/>
+                </a:solidFill>
+                <a:latin typeface="Arial" pitchFamily="34" charset="0"/>
+                <a:ea typeface="Arial" pitchFamily="34" charset="-122"/>
+                <a:cs typeface="Arial" pitchFamily="34" charset="-120"/>
+              </a:rPr>
+              <a:t>quizzes/summative.md</a:t>
+            </a:r>
+            <a:endParaRPr lang="en-US" sz="1200" dirty="0"/>
+          </a:p>
+          <a:p>
+            <a:pPr algn="l" marL="342900" indent="-342900">
+              <a:lnSpc>
+                <a:spcPts val="1620"/>
+              </a:lnSpc>
+              <a:spcAft>
+                <a:spcPts val="300"/>
+              </a:spcAft>
+              <a:buSzPct val="100000"/>
+              <a:buChar char="•"/>
+            </a:pPr>
+            <a:r>
+              <a:rPr lang="en-US" sz="1200" b="1" dirty="0">
+                <a:solidFill>
+                  <a:srgbClr val="1C2833"/>
+                </a:solidFill>
+                <a:latin typeface="Arial" pitchFamily="34" charset="0"/>
+                <a:ea typeface="Arial" pitchFamily="34" charset="-122"/>
+                <a:cs typeface="Arial" pitchFamily="34" charset="-120"/>
+              </a:rPr>
+              <a:t>Project artefact</a:t>
+            </a:r>
+            <a:pPr algn="l" indent="0" marL="0">
+              <a:lnSpc>
+                <a:spcPts val="1620"/>
+              </a:lnSpc>
+              <a:spcAft>
+                <a:spcPts val="300"/>
+              </a:spcAft>
+              <a:buNone/>
+            </a:pPr>
+            <a:r>
+              <a:rPr lang="en-US" sz="1200" dirty="0">
+                <a:solidFill>
+                  <a:srgbClr val="1C2833"/>
+                </a:solidFill>
+                <a:latin typeface="Arial" pitchFamily="34" charset="0"/>
+                <a:ea typeface="Arial" pitchFamily="34" charset="-122"/>
+                <a:cs typeface="Arial" pitchFamily="34" charset="-120"/>
+              </a:rPr>
+              <a:t> — 30 · rubric </a:t>
+            </a:r>
+            <a:pPr algn="l" indent="0" marL="0">
+              <a:lnSpc>
+                <a:spcPts val="1620"/>
+              </a:lnSpc>
+              <a:spcAft>
+                <a:spcPts val="300"/>
+              </a:spcAft>
+              <a:buNone/>
+            </a:pPr>
+            <a:r>
+              <a:rPr lang="en-US" sz="1200" dirty="0">
+                <a:solidFill>
+                  <a:srgbClr val="1C2833"/>
+                </a:solidFill>
+                <a:latin typeface="Arial" pitchFamily="34" charset="0"/>
+                <a:ea typeface="Arial" pitchFamily="34" charset="-122"/>
+                <a:cs typeface="Arial" pitchFamily="34" charset="-120"/>
+              </a:rPr>
+              <a:t>assessments/rubric.md</a:t>
+            </a:r>
+            <a:endParaRPr lang="en-US" sz="1200" dirty="0"/>
+          </a:p>
+          <a:p>
+            <a:pPr algn="l" marL="342900" indent="-342900">
+              <a:lnSpc>
+                <a:spcPts val="1620"/>
+              </a:lnSpc>
+              <a:spcAft>
+                <a:spcPts val="300"/>
+              </a:spcAft>
+              <a:buSzPct val="100000"/>
+              <a:buChar char="•"/>
+            </a:pPr>
+            <a:r>
+              <a:rPr lang="en-US" sz="1200" b="1" dirty="0">
+                <a:solidFill>
+                  <a:srgbClr val="1C2833"/>
+                </a:solidFill>
+                <a:latin typeface="Arial" pitchFamily="34" charset="0"/>
+                <a:ea typeface="Arial" pitchFamily="34" charset="-122"/>
+                <a:cs typeface="Arial" pitchFamily="34" charset="-120"/>
+              </a:rPr>
+              <a:t>Presentation (Day 10)</a:t>
+            </a:r>
+            <a:pPr algn="l" indent="0" marL="0">
+              <a:lnSpc>
+                <a:spcPts val="1620"/>
+              </a:lnSpc>
+              <a:spcAft>
+                <a:spcPts val="300"/>
+              </a:spcAft>
+              <a:buNone/>
+            </a:pPr>
+            <a:r>
+              <a:rPr lang="en-US" sz="1200" dirty="0">
+                <a:solidFill>
+                  <a:srgbClr val="1C2833"/>
+                </a:solidFill>
+                <a:latin typeface="Arial" pitchFamily="34" charset="0"/>
+                <a:ea typeface="Arial" pitchFamily="34" charset="-122"/>
+                <a:cs typeface="Arial" pitchFamily="34" charset="-120"/>
+              </a:rPr>
+              <a:t> — 10 · rubric </a:t>
+            </a:r>
+            <a:pPr algn="l" indent="0" marL="0">
+              <a:lnSpc>
+                <a:spcPts val="1620"/>
+              </a:lnSpc>
+              <a:spcAft>
+                <a:spcPts val="300"/>
+              </a:spcAft>
+              <a:buNone/>
+            </a:pPr>
+            <a:r>
+              <a:rPr lang="en-US" sz="1200" dirty="0">
+                <a:solidFill>
+                  <a:srgbClr val="1C2833"/>
+                </a:solidFill>
+                <a:latin typeface="Arial" pitchFamily="34" charset="0"/>
+                <a:ea typeface="Arial" pitchFamily="34" charset="-122"/>
+                <a:cs typeface="Arial" pitchFamily="34" charset="-120"/>
+              </a:rPr>
+              <a:t>assessments/rubric.md</a:t>
+            </a:r>
+            <a:endParaRPr lang="en-US" sz="1200" dirty="0"/>
+          </a:p>
+          <a:p>
+            <a:pPr algn="l" marL="342900" indent="-342900">
+              <a:lnSpc>
+                <a:spcPts val="1620"/>
+              </a:lnSpc>
+              <a:spcAft>
+                <a:spcPts val="300"/>
+              </a:spcAft>
+              <a:buSzPct val="100000"/>
+              <a:buChar char="•"/>
+            </a:pPr>
+            <a:r>
+              <a:rPr lang="en-US" sz="1200" b="1" dirty="0">
+                <a:solidFill>
+                  <a:srgbClr val="1C2833"/>
+                </a:solidFill>
+                <a:latin typeface="Arial" pitchFamily="34" charset="0"/>
+                <a:ea typeface="Arial" pitchFamily="34" charset="-122"/>
+                <a:cs typeface="Arial" pitchFamily="34" charset="-120"/>
+              </a:rPr>
+              <a:t>Total</a:t>
+            </a:r>
+            <a:pPr algn="l" indent="0" marL="0">
+              <a:lnSpc>
+                <a:spcPts val="1620"/>
+              </a:lnSpc>
+              <a:spcAft>
+                <a:spcPts val="300"/>
+              </a:spcAft>
+              <a:buNone/>
+            </a:pPr>
+            <a:r>
+              <a:rPr lang="en-US" sz="1200" dirty="0">
+                <a:solidFill>
+                  <a:srgbClr val="1C2833"/>
+                </a:solidFill>
+                <a:latin typeface="Arial" pitchFamily="34" charset="0"/>
+                <a:ea typeface="Arial" pitchFamily="34" charset="-122"/>
+                <a:cs typeface="Arial" pitchFamily="34" charset="-120"/>
+              </a:rPr>
+              <a:t> — </a:t>
+            </a:r>
+            <a:pPr algn="l" indent="0" marL="0">
+              <a:lnSpc>
+                <a:spcPts val="1620"/>
+              </a:lnSpc>
+              <a:spcAft>
+                <a:spcPts val="300"/>
+              </a:spcAft>
+              <a:buNone/>
+            </a:pPr>
+            <a:r>
+              <a:rPr lang="en-US" sz="1200" b="1" dirty="0">
+                <a:solidFill>
+                  <a:srgbClr val="1C2833"/>
+                </a:solidFill>
+                <a:latin typeface="Arial" pitchFamily="34" charset="0"/>
+                <a:ea typeface="Arial" pitchFamily="34" charset="-122"/>
+                <a:cs typeface="Arial" pitchFamily="34" charset="-120"/>
+              </a:rPr>
+              <a:t>65</a:t>
+            </a:r>
+            <a:pPr algn="l" indent="0" marL="0">
+              <a:lnSpc>
+                <a:spcPts val="1620"/>
+              </a:lnSpc>
+              <a:spcAft>
+                <a:spcPts val="300"/>
+              </a:spcAft>
+              <a:buNone/>
+            </a:pPr>
+            <a:r>
+              <a:rPr lang="en-US" sz="1200" dirty="0">
+                <a:solidFill>
+                  <a:srgbClr val="1C2833"/>
+                </a:solidFill>
+                <a:latin typeface="Arial" pitchFamily="34" charset="0"/>
+                <a:ea typeface="Arial" pitchFamily="34" charset="-122"/>
+                <a:cs typeface="Arial" pitchFamily="34" charset="-120"/>
+              </a:rPr>
+              <a:t> (scaled to 40 for module total — see rubric)</a:t>
+            </a:r>
+            <a:endParaRPr lang="en-US" sz="1200" dirty="0"/>
+          </a:p>
+        </p:txBody>
+      </p:sp>
+      <p:sp>
+        <p:nvSpPr>
+          <p:cNvPr id="6" name="Text 4"/>
+          <p:cNvSpPr/>
+          <p:nvPr/>
+        </p:nvSpPr>
+        <p:spPr>
+          <a:xfrm>
+            <a:off x="406301" y="2332286"/>
+            <a:ext cx="8498026" cy="213271"/>
+          </a:xfrm>
+          <a:prstGeom prst="rect">
+            <a:avLst/>
+          </a:prstGeom>
+          <a:noFill/>
+          <a:ln/>
+        </p:spPr>
+        <p:txBody>
+          <a:bodyPr wrap="square" lIns="0" tIns="0" rIns="0" bIns="0" rtlCol="0" anchor="t"/>
+          <a:lstStyle/>
+          <a:p>
+            <a:pPr algn="l" indent="0" marL="0">
+              <a:lnSpc>
+                <a:spcPts val="1680"/>
+              </a:lnSpc>
+              <a:spcBef>
+                <a:spcPts val="300"/>
+              </a:spcBef>
+              <a:spcAft>
+                <a:spcPts val="300"/>
+              </a:spcAft>
+              <a:buNone/>
+            </a:pPr>
+            <a:r>
+              <a:rPr lang="en-US" sz="1200" dirty="0">
+                <a:solidFill>
+                  <a:srgbClr val="1C2833"/>
+                </a:solidFill>
+                <a:latin typeface="Arial" pitchFamily="34" charset="0"/>
+                <a:ea typeface="Arial" pitchFamily="34" charset="-122"/>
+                <a:cs typeface="Arial" pitchFamily="34" charset="-120"/>
+              </a:rPr>
               <a:t>Reflection slips are not graded; they inform next module's design.</a:t>
             </a:r>
             <a:endParaRPr lang="en-US" sz="1200" dirty="0"/>
@@ -4223,7 +4569,7 @@
       </p:sp>
       <p:sp>
         <p:nvSpPr>
-          <p:cNvPr id="5" name="Text 3"/>
+          <p:cNvPr id="7" name="Text 5"/>
           <p:cNvSpPr/>
           <p:nvPr/>
         </p:nvSpPr>

--- a/exports/pptx/lessons/middle-module-12-movement-of-sun/day-10-final-assessment.pptx
+++ b/exports/pptx/lessons/middle-module-12-movement-of-sun/day-10-final-assessment.pptx
@@ -16,9 +16,12 @@
     <p:sldId id="264" r:id="rId10"/>
     <p:sldId id="265" r:id="rId11"/>
     <p:sldId id="266" r:id="rId12"/>
+    <p:sldId id="267" r:id="rId13"/>
+    <p:sldId id="268" r:id="rId14"/>
+    <p:sldId id="269" r:id="rId15"/>
   </p:sldIdLst>
   <p:notesMasterIdLst>
-    <p:notesMasterId r:id="rId13"/>
+    <p:notesMasterId r:id="rId16"/>
   </p:notesMasterIdLst>
   <p:sldSz cx="9144000" cy="5143500"/>
   <p:notesSz cx="5143500" cy="9144000"/>
@@ -712,6 +715,270 @@
             <a:fld id="{F7021451-1387-4CA6-816F-3879F97B5CBC}" type="slidenum">
               <a:rPr lang="en-US"/>
               <a:t>11</a:t>
+            </a:fld>
+            <a:endParaRPr lang="en-US"/>
+          </a:p>
+        </p:txBody>
+      </p:sp>
+    </p:spTree>
+    <p:extLst>
+      <p:ext uri="{BB962C8B-B14F-4D97-AF65-F5344CB8AC3E}">
+        <p14:creationId xmlns:p14="http://schemas.microsoft.com/office/powerpoint/2010/main" val="1024086991"/>
+      </p:ext>
+    </p:extLst>
+  </p:cSld>
+  <p:clrMapOvr>
+    <a:masterClrMapping/>
+  </p:clrMapOvr>
+</p:notes>
+</file>
+
+<file path=ppt/notesSlides/notesSlide12.xml><?xml version="1.0" encoding="utf-8"?>
+<p:notes xmlns:a="http://schemas.openxmlformats.org/drawingml/2006/main" xmlns:r="http://schemas.openxmlformats.org/officeDocument/2006/relationships" xmlns:p="http://schemas.openxmlformats.org/presentationml/2006/main">
+  <p:cSld>
+    <p:spTree>
+      <p:nvGrpSpPr>
+        <p:cNvPr id="1" name=""/>
+        <p:cNvGrpSpPr/>
+        <p:nvPr/>
+      </p:nvGrpSpPr>
+      <p:grpSpPr>
+        <a:xfrm>
+          <a:off x="0" y="0"/>
+          <a:ext cx="0" cy="0"/>
+          <a:chOff x="0" y="0"/>
+          <a:chExt cx="0" cy="0"/>
+        </a:xfrm>
+      </p:grpSpPr>
+      <p:sp>
+        <p:nvSpPr>
+          <p:cNvPr id="2" name="Slide Image Placeholder 1"/>
+          <p:cNvSpPr>
+            <a:spLocks noGrp="1" noRot="1" noChangeAspect="1"/>
+          </p:cNvSpPr>
+          <p:nvPr>
+            <p:ph type="sldImg"/>
+          </p:nvPr>
+        </p:nvSpPr>
+        <p:spPr/>
+      </p:sp>
+      <p:sp>
+        <p:nvSpPr>
+          <p:cNvPr id="3" name="Notes Placeholder 2"/>
+          <p:cNvSpPr>
+            <a:spLocks noGrp="1"/>
+          </p:cNvSpPr>
+          <p:nvPr>
+            <p:ph type="body" idx="1"/>
+          </p:nvPr>
+        </p:nvSpPr>
+        <p:spPr/>
+        <p:txBody>
+          <a:bodyPr/>
+          <a:lstStyle/>
+          <a:p>
+            <a:r>
+              <a:rPr lang="en-US" dirty="0"/>
+              <a:t/>
+            </a:r>
+            <a:endParaRPr lang="en-US" dirty="0"/>
+          </a:p>
+        </p:txBody>
+      </p:sp>
+      <p:sp>
+        <p:nvSpPr>
+          <p:cNvPr id="4" name="Slide Number Placeholder 3"/>
+          <p:cNvSpPr>
+            <a:spLocks noGrp="1"/>
+          </p:cNvSpPr>
+          <p:nvPr>
+            <p:ph type="sldNum" sz="quarter" idx="10"/>
+          </p:nvPr>
+        </p:nvSpPr>
+        <p:spPr/>
+        <p:txBody>
+          <a:bodyPr/>
+          <a:lstStyle/>
+          <a:p>
+            <a:fld id="{F7021451-1387-4CA6-816F-3879F97B5CBC}" type="slidenum">
+              <a:rPr lang="en-US"/>
+              <a:t>12</a:t>
+            </a:fld>
+            <a:endParaRPr lang="en-US"/>
+          </a:p>
+        </p:txBody>
+      </p:sp>
+    </p:spTree>
+    <p:extLst>
+      <p:ext uri="{BB962C8B-B14F-4D97-AF65-F5344CB8AC3E}">
+        <p14:creationId xmlns:p14="http://schemas.microsoft.com/office/powerpoint/2010/main" val="1024086991"/>
+      </p:ext>
+    </p:extLst>
+  </p:cSld>
+  <p:clrMapOvr>
+    <a:masterClrMapping/>
+  </p:clrMapOvr>
+</p:notes>
+</file>
+
+<file path=ppt/notesSlides/notesSlide13.xml><?xml version="1.0" encoding="utf-8"?>
+<p:notes xmlns:a="http://schemas.openxmlformats.org/drawingml/2006/main" xmlns:r="http://schemas.openxmlformats.org/officeDocument/2006/relationships" xmlns:p="http://schemas.openxmlformats.org/presentationml/2006/main">
+  <p:cSld>
+    <p:spTree>
+      <p:nvGrpSpPr>
+        <p:cNvPr id="1" name=""/>
+        <p:cNvGrpSpPr/>
+        <p:nvPr/>
+      </p:nvGrpSpPr>
+      <p:grpSpPr>
+        <a:xfrm>
+          <a:off x="0" y="0"/>
+          <a:ext cx="0" cy="0"/>
+          <a:chOff x="0" y="0"/>
+          <a:chExt cx="0" cy="0"/>
+        </a:xfrm>
+      </p:grpSpPr>
+      <p:sp>
+        <p:nvSpPr>
+          <p:cNvPr id="2" name="Slide Image Placeholder 1"/>
+          <p:cNvSpPr>
+            <a:spLocks noGrp="1" noRot="1" noChangeAspect="1"/>
+          </p:cNvSpPr>
+          <p:nvPr>
+            <p:ph type="sldImg"/>
+          </p:nvPr>
+        </p:nvSpPr>
+        <p:spPr/>
+      </p:sp>
+      <p:sp>
+        <p:nvSpPr>
+          <p:cNvPr id="3" name="Notes Placeholder 2"/>
+          <p:cNvSpPr>
+            <a:spLocks noGrp="1"/>
+          </p:cNvSpPr>
+          <p:nvPr>
+            <p:ph type="body" idx="1"/>
+          </p:nvPr>
+        </p:nvSpPr>
+        <p:spPr/>
+        <p:txBody>
+          <a:bodyPr/>
+          <a:lstStyle/>
+          <a:p>
+            <a:r>
+              <a:rPr lang="en-US" dirty="0"/>
+              <a:t/>
+            </a:r>
+            <a:endParaRPr lang="en-US" dirty="0"/>
+          </a:p>
+        </p:txBody>
+      </p:sp>
+      <p:sp>
+        <p:nvSpPr>
+          <p:cNvPr id="4" name="Slide Number Placeholder 3"/>
+          <p:cNvSpPr>
+            <a:spLocks noGrp="1"/>
+          </p:cNvSpPr>
+          <p:nvPr>
+            <p:ph type="sldNum" sz="quarter" idx="10"/>
+          </p:nvPr>
+        </p:nvSpPr>
+        <p:spPr/>
+        <p:txBody>
+          <a:bodyPr/>
+          <a:lstStyle/>
+          <a:p>
+            <a:fld id="{F7021451-1387-4CA6-816F-3879F97B5CBC}" type="slidenum">
+              <a:rPr lang="en-US"/>
+              <a:t>13</a:t>
+            </a:fld>
+            <a:endParaRPr lang="en-US"/>
+          </a:p>
+        </p:txBody>
+      </p:sp>
+    </p:spTree>
+    <p:extLst>
+      <p:ext uri="{BB962C8B-B14F-4D97-AF65-F5344CB8AC3E}">
+        <p14:creationId xmlns:p14="http://schemas.microsoft.com/office/powerpoint/2010/main" val="1024086991"/>
+      </p:ext>
+    </p:extLst>
+  </p:cSld>
+  <p:clrMapOvr>
+    <a:masterClrMapping/>
+  </p:clrMapOvr>
+</p:notes>
+</file>
+
+<file path=ppt/notesSlides/notesSlide14.xml><?xml version="1.0" encoding="utf-8"?>
+<p:notes xmlns:a="http://schemas.openxmlformats.org/drawingml/2006/main" xmlns:r="http://schemas.openxmlformats.org/officeDocument/2006/relationships" xmlns:p="http://schemas.openxmlformats.org/presentationml/2006/main">
+  <p:cSld>
+    <p:spTree>
+      <p:nvGrpSpPr>
+        <p:cNvPr id="1" name=""/>
+        <p:cNvGrpSpPr/>
+        <p:nvPr/>
+      </p:nvGrpSpPr>
+      <p:grpSpPr>
+        <a:xfrm>
+          <a:off x="0" y="0"/>
+          <a:ext cx="0" cy="0"/>
+          <a:chOff x="0" y="0"/>
+          <a:chExt cx="0" cy="0"/>
+        </a:xfrm>
+      </p:grpSpPr>
+      <p:sp>
+        <p:nvSpPr>
+          <p:cNvPr id="2" name="Slide Image Placeholder 1"/>
+          <p:cNvSpPr>
+            <a:spLocks noGrp="1" noRot="1" noChangeAspect="1"/>
+          </p:cNvSpPr>
+          <p:nvPr>
+            <p:ph type="sldImg"/>
+          </p:nvPr>
+        </p:nvSpPr>
+        <p:spPr/>
+      </p:sp>
+      <p:sp>
+        <p:nvSpPr>
+          <p:cNvPr id="3" name="Notes Placeholder 2"/>
+          <p:cNvSpPr>
+            <a:spLocks noGrp="1"/>
+          </p:cNvSpPr>
+          <p:nvPr>
+            <p:ph type="body" idx="1"/>
+          </p:nvPr>
+        </p:nvSpPr>
+        <p:spPr/>
+        <p:txBody>
+          <a:bodyPr/>
+          <a:lstStyle/>
+          <a:p>
+            <a:r>
+              <a:rPr lang="en-US" dirty="0"/>
+              <a:t/>
+            </a:r>
+            <a:endParaRPr lang="en-US" dirty="0"/>
+          </a:p>
+        </p:txBody>
+      </p:sp>
+      <p:sp>
+        <p:nvSpPr>
+          <p:cNvPr id="4" name="Slide Number Placeholder 3"/>
+          <p:cNvSpPr>
+            <a:spLocks noGrp="1"/>
+          </p:cNvSpPr>
+          <p:nvPr>
+            <p:ph type="sldNum" sz="quarter" idx="10"/>
+          </p:nvPr>
+        </p:nvSpPr>
+        <p:spPr/>
+        <p:txBody>
+          <a:bodyPr/>
+          <a:lstStyle/>
+          <a:p>
+            <a:fld id="{F7021451-1387-4CA6-816F-3879F97B5CBC}" type="slidenum">
+              <a:rPr lang="en-US"/>
+              <a:t>14</a:t>
             </a:fld>
             <a:endParaRPr lang="en-US"/>
           </a:p>
@@ -2011,148 +2278,6 @@
         </p:nvSpPr>
         <p:spPr>
           <a:xfrm>
-            <a:off x="406301" y="1223963"/>
-            <a:ext cx="8498026" cy="274290"/>
-          </a:xfrm>
-          <a:prstGeom prst="rect">
-            <a:avLst/>
-          </a:prstGeom>
-          <a:noFill/>
-          <a:ln/>
-        </p:spPr>
-        <p:txBody>
-          <a:bodyPr wrap="square" lIns="0" tIns="0" rIns="0" bIns="0" rtlCol="0" anchor="t"/>
-          <a:lstStyle/>
-          <a:p>
-            <a:pPr algn="l" indent="0" marL="0">
-              <a:lnSpc>
-                <a:spcPts val="2160"/>
-              </a:lnSpc>
-              <a:spcBef>
-                <a:spcPts val="600"/>
-              </a:spcBef>
-              <a:spcAft>
-                <a:spcPts val="800"/>
-              </a:spcAft>
-              <a:buNone/>
-            </a:pPr>
-            <a:r>
-              <a:rPr lang="en-US" sz="1800" b="1" dirty="0">
-                <a:solidFill>
-                  <a:srgbClr val="FE4447"/>
-                </a:solidFill>
-                <a:latin typeface="Georgia" pitchFamily="34" charset="0"/>
-                <a:ea typeface="Georgia" pitchFamily="34" charset="-122"/>
-                <a:cs typeface="Georgia" pitchFamily="34" charset="-120"/>
-              </a:rPr>
-              <a:t>Learning objective</a:t>
-            </a:r>
-            <a:endParaRPr lang="en-US" sz="1800" dirty="0"/>
-          </a:p>
-        </p:txBody>
-      </p:sp>
-      <p:sp>
-        <p:nvSpPr>
-          <p:cNvPr id="6" name="Text 4"/>
-          <p:cNvSpPr/>
-          <p:nvPr/>
-        </p:nvSpPr>
-        <p:spPr>
-          <a:xfrm>
-            <a:off x="406301" y="1637854"/>
-            <a:ext cx="8498026" cy="426541"/>
-          </a:xfrm>
-          <a:prstGeom prst="rect">
-            <a:avLst/>
-          </a:prstGeom>
-          <a:noFill/>
-          <a:ln/>
-        </p:spPr>
-        <p:txBody>
-          <a:bodyPr wrap="square" lIns="0" tIns="0" rIns="0" bIns="0" rtlCol="0" anchor="t"/>
-          <a:lstStyle/>
-          <a:p>
-            <a:pPr algn="l" indent="0" marL="0">
-              <a:lnSpc>
-                <a:spcPts val="1680"/>
-              </a:lnSpc>
-              <a:spcBef>
-                <a:spcPts val="300"/>
-              </a:spcBef>
-              <a:spcAft>
-                <a:spcPts val="300"/>
-              </a:spcAft>
-              <a:buNone/>
-            </a:pPr>
-            <a:r>
-              <a:rPr lang="en-US" sz="1200" dirty="0">
-                <a:solidFill>
-                  <a:srgbClr val="1C2833"/>
-                </a:solidFill>
-                <a:latin typeface="Arial" pitchFamily="34" charset="0"/>
-                <a:ea typeface="Arial" pitchFamily="34" charset="-122"/>
-                <a:cs typeface="Arial" pitchFamily="34" charset="-120"/>
-              </a:rPr>
-              <a:t>By the end of this session, the module is closed: the summative quiz is sat, the </a:t>
-            </a:r>
-            <a:pPr algn="l" indent="0" marL="0">
-              <a:lnSpc>
-                <a:spcPts val="1680"/>
-              </a:lnSpc>
-              <a:spcBef>
-                <a:spcPts val="300"/>
-              </a:spcBef>
-              <a:spcAft>
-                <a:spcPts val="300"/>
-              </a:spcAft>
-              <a:buNone/>
-            </a:pPr>
-            <a:r>
-              <a:rPr lang="en-US" sz="1200" i="1" dirty="0">
-                <a:solidFill>
-                  <a:srgbClr val="1C2833"/>
-                </a:solidFill>
-                <a:latin typeface="Arial" pitchFamily="34" charset="0"/>
-                <a:ea typeface="Arial" pitchFamily="34" charset="-122"/>
-                <a:cs typeface="Arial" pitchFamily="34" charset="-120"/>
-              </a:rPr>
-              <a:t>rāśi</a:t>
-            </a:r>
-            <a:pPr algn="l" indent="0" marL="0">
-              <a:lnSpc>
-                <a:spcPts val="1680"/>
-              </a:lnSpc>
-              <a:spcBef>
-                <a:spcPts val="300"/>
-              </a:spcBef>
-              <a:spcAft>
-                <a:spcPts val="300"/>
-              </a:spcAft>
-              <a:buNone/>
-            </a:pPr>
-            <a:r>
-              <a:rPr lang="en-US" sz="1200" dirty="0">
-                <a:solidFill>
-                  <a:srgbClr val="1C2833"/>
-                </a:solidFill>
-                <a:latin typeface="Arial" pitchFamily="34" charset="0"/>
-                <a:ea typeface="Arial" pitchFamily="34" charset="-122"/>
-                <a:cs typeface="Arial" pitchFamily="34" charset="-120"/>
-              </a:rPr>
-              <a:t>-wheel projects are presented to peers, and reflection slips are submitted.</a:t>
-            </a:r>
-            <a:endParaRPr lang="en-US" sz="1200" dirty="0"/>
-          </a:p>
-        </p:txBody>
-      </p:sp>
-      <p:sp>
-        <p:nvSpPr>
-          <p:cNvPr id="7" name="Text 5"/>
-          <p:cNvSpPr/>
-          <p:nvPr/>
-        </p:nvSpPr>
-        <p:spPr>
-          <a:xfrm>
             <a:off x="406301" y="4434929"/>
             <a:ext cx="8498026" cy="213271"/>
           </a:xfrm>
@@ -2297,7 +2422,7 @@
                 <a:ea typeface="Georgia" pitchFamily="34" charset="-122"/>
                 <a:cs typeface="Georgia" pitchFamily="34" charset="-120"/>
               </a:rPr>
-              <a:t>Citation(s) used in this lesson</a:t>
+              <a:t>What gets graded today</a:t>
             </a:r>
             <a:endParaRPr lang="en-US" sz="1800" dirty="0"/>
           </a:p>
@@ -2337,6 +2462,72 @@
               <a:buNone/>
             </a:pPr>
             <a:r>
+              <a:rPr lang="en-US" sz="1200" i="1" dirty="0">
+                <a:solidFill>
+                  <a:srgbClr val="1C2833"/>
+                </a:solidFill>
+                <a:latin typeface="Arial" pitchFamily="34" charset="0"/>
+                <a:ea typeface="Arial" pitchFamily="34" charset="-122"/>
+                <a:cs typeface="Arial" pitchFamily="34" charset="-120"/>
+              </a:rPr>
+              <a:t>Each row: Item · Marks · Where it lives.</a:t>
+            </a:r>
+            <a:endParaRPr lang="en-US" sz="1200" dirty="0"/>
+          </a:p>
+        </p:txBody>
+      </p:sp>
+      <p:sp>
+        <p:nvSpPr>
+          <p:cNvPr id="5" name="Text 3"/>
+          <p:cNvSpPr/>
+          <p:nvPr/>
+        </p:nvSpPr>
+        <p:spPr>
+          <a:xfrm>
+            <a:off x="634901" y="1173063"/>
+            <a:ext cx="8102798" cy="1070372"/>
+          </a:xfrm>
+          <a:prstGeom prst="rect">
+            <a:avLst/>
+          </a:prstGeom>
+          <a:noFill/>
+          <a:ln/>
+        </p:spPr>
+        <p:txBody>
+          <a:bodyPr wrap="square" lIns="0" tIns="0" rIns="0" bIns="0" rtlCol="0" anchor="t"/>
+          <a:lstStyle/>
+          <a:p>
+            <a:pPr algn="l" marL="342900" indent="-342900">
+              <a:lnSpc>
+                <a:spcPts val="1620"/>
+              </a:lnSpc>
+              <a:spcAft>
+                <a:spcPts val="300"/>
+              </a:spcAft>
+              <a:buSzPct val="100000"/>
+              <a:buChar char="•"/>
+            </a:pPr>
+            <a:r>
+              <a:rPr lang="en-US" sz="1200" b="1" dirty="0">
+                <a:solidFill>
+                  <a:srgbClr val="1C2833"/>
+                </a:solidFill>
+                <a:latin typeface="Arial" pitchFamily="34" charset="0"/>
+                <a:ea typeface="Arial" pitchFamily="34" charset="-122"/>
+                <a:cs typeface="Arial" pitchFamily="34" charset="-120"/>
+              </a:rPr>
+              <a:t>Summative quiz</a:t>
+            </a:r>
+            <a:pPr algn="l" indent="0" marL="0">
+              <a:lnSpc>
+                <a:spcPts val="1620"/>
+              </a:lnSpc>
+              <a:spcAft>
+                <a:spcPts val="300"/>
+              </a:spcAft>
+              <a:buNone/>
+            </a:pPr>
+            <a:r>
               <a:rPr lang="en-US" sz="1200" dirty="0">
                 <a:solidFill>
                   <a:srgbClr val="1C2833"/>
@@ -2345,15 +2536,295 @@
                 <a:ea typeface="Arial" pitchFamily="34" charset="-122"/>
                 <a:cs typeface="Arial" pitchFamily="34" charset="-120"/>
               </a:rPr>
-              <a:t>– All citations were addressed in earlier days. No new citations introduced today.</a:t>
+              <a:t> — 25 · </a:t>
+            </a:r>
+            <a:pPr algn="l" indent="0" marL="0">
+              <a:lnSpc>
+                <a:spcPts val="1620"/>
+              </a:lnSpc>
+              <a:spcAft>
+                <a:spcPts val="300"/>
+              </a:spcAft>
+              <a:buNone/>
+            </a:pPr>
+            <a:r>
+              <a:rPr lang="en-US" sz="1200" dirty="0">
+                <a:solidFill>
+                  <a:srgbClr val="1C2833"/>
+                </a:solidFill>
+                <a:latin typeface="Arial" pitchFamily="34" charset="0"/>
+                <a:ea typeface="Arial" pitchFamily="34" charset="-122"/>
+                <a:cs typeface="Arial" pitchFamily="34" charset="-120"/>
+              </a:rPr>
+              <a:t>quizzes/summative.md</a:t>
             </a:r>
             <a:endParaRPr lang="en-US" sz="1200" dirty="0"/>
           </a:p>
-        </p:txBody>
-      </p:sp>
-      <p:sp>
-        <p:nvSpPr>
-          <p:cNvPr id="5" name="Text 3"/>
+          <a:p>
+            <a:pPr algn="l" marL="342900" indent="-342900">
+              <a:lnSpc>
+                <a:spcPts val="1620"/>
+              </a:lnSpc>
+              <a:spcAft>
+                <a:spcPts val="300"/>
+              </a:spcAft>
+              <a:buSzPct val="100000"/>
+              <a:buChar char="•"/>
+            </a:pPr>
+            <a:r>
+              <a:rPr lang="en-US" sz="1200" b="1" dirty="0">
+                <a:solidFill>
+                  <a:srgbClr val="1C2833"/>
+                </a:solidFill>
+                <a:latin typeface="Arial" pitchFamily="34" charset="0"/>
+                <a:ea typeface="Arial" pitchFamily="34" charset="-122"/>
+                <a:cs typeface="Arial" pitchFamily="34" charset="-120"/>
+              </a:rPr>
+              <a:t>Project artefact</a:t>
+            </a:r>
+            <a:pPr algn="l" indent="0" marL="0">
+              <a:lnSpc>
+                <a:spcPts val="1620"/>
+              </a:lnSpc>
+              <a:spcAft>
+                <a:spcPts val="300"/>
+              </a:spcAft>
+              <a:buNone/>
+            </a:pPr>
+            <a:r>
+              <a:rPr lang="en-US" sz="1200" dirty="0">
+                <a:solidFill>
+                  <a:srgbClr val="1C2833"/>
+                </a:solidFill>
+                <a:latin typeface="Arial" pitchFamily="34" charset="0"/>
+                <a:ea typeface="Arial" pitchFamily="34" charset="-122"/>
+                <a:cs typeface="Arial" pitchFamily="34" charset="-120"/>
+              </a:rPr>
+              <a:t> — 30 · rubric </a:t>
+            </a:r>
+            <a:pPr algn="l" indent="0" marL="0">
+              <a:lnSpc>
+                <a:spcPts val="1620"/>
+              </a:lnSpc>
+              <a:spcAft>
+                <a:spcPts val="300"/>
+              </a:spcAft>
+              <a:buNone/>
+            </a:pPr>
+            <a:r>
+              <a:rPr lang="en-US" sz="1200" dirty="0">
+                <a:solidFill>
+                  <a:srgbClr val="1C2833"/>
+                </a:solidFill>
+                <a:latin typeface="Arial" pitchFamily="34" charset="0"/>
+                <a:ea typeface="Arial" pitchFamily="34" charset="-122"/>
+                <a:cs typeface="Arial" pitchFamily="34" charset="-120"/>
+              </a:rPr>
+              <a:t>assessments/rubric.md</a:t>
+            </a:r>
+            <a:endParaRPr lang="en-US" sz="1200" dirty="0"/>
+          </a:p>
+          <a:p>
+            <a:pPr algn="l" marL="342900" indent="-342900">
+              <a:lnSpc>
+                <a:spcPts val="1620"/>
+              </a:lnSpc>
+              <a:spcAft>
+                <a:spcPts val="300"/>
+              </a:spcAft>
+              <a:buSzPct val="100000"/>
+              <a:buChar char="•"/>
+            </a:pPr>
+            <a:r>
+              <a:rPr lang="en-US" sz="1200" b="1" dirty="0">
+                <a:solidFill>
+                  <a:srgbClr val="1C2833"/>
+                </a:solidFill>
+                <a:latin typeface="Arial" pitchFamily="34" charset="0"/>
+                <a:ea typeface="Arial" pitchFamily="34" charset="-122"/>
+                <a:cs typeface="Arial" pitchFamily="34" charset="-120"/>
+              </a:rPr>
+              <a:t>Presentation (Day 10)</a:t>
+            </a:r>
+            <a:pPr algn="l" indent="0" marL="0">
+              <a:lnSpc>
+                <a:spcPts val="1620"/>
+              </a:lnSpc>
+              <a:spcAft>
+                <a:spcPts val="300"/>
+              </a:spcAft>
+              <a:buNone/>
+            </a:pPr>
+            <a:r>
+              <a:rPr lang="en-US" sz="1200" dirty="0">
+                <a:solidFill>
+                  <a:srgbClr val="1C2833"/>
+                </a:solidFill>
+                <a:latin typeface="Arial" pitchFamily="34" charset="0"/>
+                <a:ea typeface="Arial" pitchFamily="34" charset="-122"/>
+                <a:cs typeface="Arial" pitchFamily="34" charset="-120"/>
+              </a:rPr>
+              <a:t> — 10 · rubric </a:t>
+            </a:r>
+            <a:pPr algn="l" indent="0" marL="0">
+              <a:lnSpc>
+                <a:spcPts val="1620"/>
+              </a:lnSpc>
+              <a:spcAft>
+                <a:spcPts val="300"/>
+              </a:spcAft>
+              <a:buNone/>
+            </a:pPr>
+            <a:r>
+              <a:rPr lang="en-US" sz="1200" dirty="0">
+                <a:solidFill>
+                  <a:srgbClr val="1C2833"/>
+                </a:solidFill>
+                <a:latin typeface="Arial" pitchFamily="34" charset="0"/>
+                <a:ea typeface="Arial" pitchFamily="34" charset="-122"/>
+                <a:cs typeface="Arial" pitchFamily="34" charset="-120"/>
+              </a:rPr>
+              <a:t>assessments/rubric.md</a:t>
+            </a:r>
+            <a:endParaRPr lang="en-US" sz="1200" dirty="0"/>
+          </a:p>
+          <a:p>
+            <a:pPr algn="l" marL="342900" indent="-342900">
+              <a:lnSpc>
+                <a:spcPts val="1620"/>
+              </a:lnSpc>
+              <a:spcAft>
+                <a:spcPts val="300"/>
+              </a:spcAft>
+              <a:buSzPct val="100000"/>
+              <a:buChar char="•"/>
+            </a:pPr>
+            <a:r>
+              <a:rPr lang="en-US" sz="1200" b="1" dirty="0">
+                <a:solidFill>
+                  <a:srgbClr val="1C2833"/>
+                </a:solidFill>
+                <a:latin typeface="Arial" pitchFamily="34" charset="0"/>
+                <a:ea typeface="Arial" pitchFamily="34" charset="-122"/>
+                <a:cs typeface="Arial" pitchFamily="34" charset="-120"/>
+              </a:rPr>
+              <a:t>Total</a:t>
+            </a:r>
+            <a:pPr algn="l" indent="0" marL="0">
+              <a:lnSpc>
+                <a:spcPts val="1620"/>
+              </a:lnSpc>
+              <a:spcAft>
+                <a:spcPts val="300"/>
+              </a:spcAft>
+              <a:buNone/>
+            </a:pPr>
+            <a:r>
+              <a:rPr lang="en-US" sz="1200" dirty="0">
+                <a:solidFill>
+                  <a:srgbClr val="1C2833"/>
+                </a:solidFill>
+                <a:latin typeface="Arial" pitchFamily="34" charset="0"/>
+                <a:ea typeface="Arial" pitchFamily="34" charset="-122"/>
+                <a:cs typeface="Arial" pitchFamily="34" charset="-120"/>
+              </a:rPr>
+              <a:t> — </a:t>
+            </a:r>
+            <a:pPr algn="l" indent="0" marL="0">
+              <a:lnSpc>
+                <a:spcPts val="1620"/>
+              </a:lnSpc>
+              <a:spcAft>
+                <a:spcPts val="300"/>
+              </a:spcAft>
+              <a:buNone/>
+            </a:pPr>
+            <a:r>
+              <a:rPr lang="en-US" sz="1200" b="1" dirty="0">
+                <a:solidFill>
+                  <a:srgbClr val="1C2833"/>
+                </a:solidFill>
+                <a:latin typeface="Arial" pitchFamily="34" charset="0"/>
+                <a:ea typeface="Arial" pitchFamily="34" charset="-122"/>
+                <a:cs typeface="Arial" pitchFamily="34" charset="-120"/>
+              </a:rPr>
+              <a:t>65</a:t>
+            </a:r>
+            <a:pPr algn="l" indent="0" marL="0">
+              <a:lnSpc>
+                <a:spcPts val="1620"/>
+              </a:lnSpc>
+              <a:spcAft>
+                <a:spcPts val="300"/>
+              </a:spcAft>
+              <a:buNone/>
+            </a:pPr>
+            <a:r>
+              <a:rPr lang="en-US" sz="1200" dirty="0">
+                <a:solidFill>
+                  <a:srgbClr val="1C2833"/>
+                </a:solidFill>
+                <a:latin typeface="Arial" pitchFamily="34" charset="0"/>
+                <a:ea typeface="Arial" pitchFamily="34" charset="-122"/>
+                <a:cs typeface="Arial" pitchFamily="34" charset="-120"/>
+              </a:rPr>
+              <a:t> (scaled to 40 for module total — see rubric)</a:t>
+            </a:r>
+            <a:endParaRPr lang="en-US" sz="1200" dirty="0"/>
+          </a:p>
+        </p:txBody>
+      </p:sp>
+      <p:sp>
+        <p:nvSpPr>
+          <p:cNvPr id="6" name="Text 4"/>
+          <p:cNvSpPr/>
+          <p:nvPr/>
+        </p:nvSpPr>
+        <p:spPr>
+          <a:xfrm>
+            <a:off x="406301" y="2332286"/>
+            <a:ext cx="8498026" cy="213271"/>
+          </a:xfrm>
+          <a:prstGeom prst="rect">
+            <a:avLst/>
+          </a:prstGeom>
+          <a:noFill/>
+          <a:ln/>
+        </p:spPr>
+        <p:txBody>
+          <a:bodyPr wrap="square" lIns="0" tIns="0" rIns="0" bIns="0" rtlCol="0" anchor="t"/>
+          <a:lstStyle/>
+          <a:p>
+            <a:pPr algn="l" indent="0" marL="0">
+              <a:lnSpc>
+                <a:spcPts val="1680"/>
+              </a:lnSpc>
+              <a:spcBef>
+                <a:spcPts val="300"/>
+              </a:spcBef>
+              <a:spcAft>
+                <a:spcPts val="300"/>
+              </a:spcAft>
+              <a:buNone/>
+            </a:pPr>
+            <a:r>
+              <a:rPr lang="en-US" sz="1200" dirty="0">
+                <a:solidFill>
+                  <a:srgbClr val="1C2833"/>
+                </a:solidFill>
+                <a:latin typeface="Arial" pitchFamily="34" charset="0"/>
+                <a:ea typeface="Arial" pitchFamily="34" charset="-122"/>
+                <a:cs typeface="Arial" pitchFamily="34" charset="-120"/>
+              </a:rPr>
+              <a:t>Reflection slips are not graded; they inform next module's design.</a:t>
+            </a:r>
+            <a:endParaRPr lang="en-US" sz="1200" dirty="0"/>
+          </a:p>
+        </p:txBody>
+      </p:sp>
+      <p:sp>
+        <p:nvSpPr>
+          <p:cNvPr id="7" name="Text 5"/>
           <p:cNvSpPr/>
           <p:nvPr/>
         </p:nvSpPr>
@@ -2503,6 +2974,834 @@
                 <a:ea typeface="Georgia" pitchFamily="34" charset="-122"/>
                 <a:cs typeface="Georgia" pitchFamily="34" charset="-120"/>
               </a:rPr>
+              <a:t>Teacher notes</a:t>
+            </a:r>
+            <a:endParaRPr lang="en-US" sz="1800" dirty="0"/>
+          </a:p>
+        </p:txBody>
+      </p:sp>
+      <p:sp>
+        <p:nvSpPr>
+          <p:cNvPr id="4" name="Text 2"/>
+          <p:cNvSpPr/>
+          <p:nvPr/>
+        </p:nvSpPr>
+        <p:spPr>
+          <a:xfrm>
+            <a:off x="634901" y="883593"/>
+            <a:ext cx="8102798" cy="1424583"/>
+          </a:xfrm>
+          <a:prstGeom prst="rect">
+            <a:avLst/>
+          </a:prstGeom>
+          <a:noFill/>
+          <a:ln/>
+        </p:spPr>
+        <p:txBody>
+          <a:bodyPr wrap="square" lIns="0" tIns="0" rIns="0" bIns="0" rtlCol="0" anchor="t"/>
+          <a:lstStyle/>
+          <a:p>
+            <a:pPr algn="l" marL="342900" indent="-342900">
+              <a:lnSpc>
+                <a:spcPts val="1620"/>
+              </a:lnSpc>
+              <a:spcAft>
+                <a:spcPts val="300"/>
+              </a:spcAft>
+              <a:buSzPct val="100000"/>
+              <a:buChar char="•"/>
+            </a:pPr>
+            <a:r>
+              <a:rPr lang="en-US" sz="1200" dirty="0">
+                <a:solidFill>
+                  <a:srgbClr val="1C2833"/>
+                </a:solidFill>
+                <a:latin typeface="Arial" pitchFamily="34" charset="0"/>
+                <a:ea typeface="Arial" pitchFamily="34" charset="-122"/>
+                <a:cs typeface="Arial" pitchFamily="34" charset="-120"/>
+              </a:rPr>
+              <a:t>The 3-minute timer is strict. The discipline of compression is part of the learning.</a:t>
+            </a:r>
+            <a:endParaRPr lang="en-US" sz="1200" dirty="0"/>
+          </a:p>
+          <a:p>
+            <a:pPr algn="l" marL="342900" indent="-342900">
+              <a:lnSpc>
+                <a:spcPts val="1620"/>
+              </a:lnSpc>
+              <a:spcAft>
+                <a:spcPts val="300"/>
+              </a:spcAft>
+              <a:buSzPct val="100000"/>
+              <a:buChar char="•"/>
+            </a:pPr>
+            <a:r>
+              <a:rPr lang="en-US" sz="1200" dirty="0">
+                <a:solidFill>
+                  <a:srgbClr val="1C2833"/>
+                </a:solidFill>
+                <a:latin typeface="Arial" pitchFamily="34" charset="0"/>
+                <a:ea typeface="Arial" pitchFamily="34" charset="-122"/>
+                <a:cs typeface="Arial" pitchFamily="34" charset="-120"/>
+              </a:rPr>
+              <a:t>If a pair runs over, the teacher gently raises a hand at 3 minutes; if they keep going past 3:30, end the presentation politely.</a:t>
+            </a:r>
+            <a:endParaRPr lang="en-US" sz="1200" dirty="0"/>
+          </a:p>
+          <a:p>
+            <a:pPr algn="l" marL="342900" indent="-342900">
+              <a:lnSpc>
+                <a:spcPts val="1620"/>
+              </a:lnSpc>
+              <a:spcAft>
+                <a:spcPts val="300"/>
+              </a:spcAft>
+              <a:buSzPct val="100000"/>
+              <a:buChar char="•"/>
+            </a:pPr>
+            <a:r>
+              <a:rPr lang="en-US" sz="1200" dirty="0">
+                <a:solidFill>
+                  <a:srgbClr val="1C2833"/>
+                </a:solidFill>
+                <a:latin typeface="Arial" pitchFamily="34" charset="0"/>
+                <a:ea typeface="Arial" pitchFamily="34" charset="-122"/>
+                <a:cs typeface="Arial" pitchFamily="34" charset="-120"/>
+              </a:rPr>
+              <a:t>For pairs that struggled — don't grade harshly during the presentation. Mark on substance + clarity, not on stage presence.</a:t>
+            </a:r>
+            <a:endParaRPr lang="en-US" sz="1200" dirty="0"/>
+          </a:p>
+          <a:p>
+            <a:pPr algn="l" marL="342900" indent="-342900">
+              <a:lnSpc>
+                <a:spcPts val="1620"/>
+              </a:lnSpc>
+              <a:spcAft>
+                <a:spcPts val="300"/>
+              </a:spcAft>
+              <a:buSzPct val="100000"/>
+              <a:buChar char="•"/>
+            </a:pPr>
+            <a:r>
+              <a:rPr lang="en-US" sz="1200" dirty="0">
+                <a:solidFill>
+                  <a:srgbClr val="1C2833"/>
+                </a:solidFill>
+                <a:latin typeface="Arial" pitchFamily="34" charset="0"/>
+                <a:ea typeface="Arial" pitchFamily="34" charset="-122"/>
+                <a:cs typeface="Arial" pitchFamily="34" charset="-120"/>
+              </a:rPr>
+              <a:t>Pin all the wheels on the wall after the showcase. Leave them up for a week.</a:t>
+            </a:r>
+            <a:endParaRPr lang="en-US" sz="1200" dirty="0"/>
+          </a:p>
+        </p:txBody>
+      </p:sp>
+      <p:sp>
+        <p:nvSpPr>
+          <p:cNvPr id="5" name="Text 3"/>
+          <p:cNvSpPr/>
+          <p:nvPr/>
+        </p:nvSpPr>
+        <p:spPr>
+          <a:xfrm>
+            <a:off x="406301" y="4434929"/>
+            <a:ext cx="8498026" cy="213271"/>
+          </a:xfrm>
+          <a:prstGeom prst="rect">
+            <a:avLst/>
+          </a:prstGeom>
+          <a:noFill/>
+          <a:ln/>
+        </p:spPr>
+        <p:txBody>
+          <a:bodyPr wrap="square" lIns="0" tIns="0" rIns="0" bIns="0" rtlCol="0" anchor="t"/>
+          <a:lstStyle/>
+          <a:p>
+            <a:pPr algn="l" indent="0" marL="0">
+              <a:lnSpc>
+                <a:spcPts val="1680"/>
+              </a:lnSpc>
+              <a:spcBef>
+                <a:spcPts val="300"/>
+              </a:spcBef>
+              <a:spcAft>
+                <a:spcPts val="300"/>
+              </a:spcAft>
+              <a:buNone/>
+            </a:pPr>
+            <a:r>
+              <a:rPr lang="en-US" sz="1200" dirty="0">
+                <a:solidFill>
+                  <a:srgbClr val="1C2833"/>
+                </a:solidFill>
+                <a:latin typeface="Arial" pitchFamily="34" charset="0"/>
+                <a:ea typeface="Arial" pitchFamily="34" charset="-122"/>
+                <a:cs typeface="Arial" pitchFamily="34" charset="-120"/>
+              </a:rPr>
+              <a:t>Middle ·  · IKS Curriculum</a:t>
+            </a:r>
+            <a:endParaRPr lang="en-US" sz="1200" dirty="0"/>
+          </a:p>
+        </p:txBody>
+      </p:sp>
+    </p:spTree>
+  </p:cSld>
+  <p:clrMapOvr>
+    <a:masterClrMapping/>
+  </p:clrMapOvr>
+</p:sld>
+</file>
+
+<file path=ppt/slides/slide12.xml><?xml version="1.0" encoding="utf-8"?>
+<p:sld xmlns:a="http://schemas.openxmlformats.org/drawingml/2006/main" xmlns:r="http://schemas.openxmlformats.org/officeDocument/2006/relationships" xmlns:p="http://schemas.openxmlformats.org/presentationml/2006/main">
+  <p:cSld name="Slide 12">
+    <p:bg>
+      <p:bgPr>
+        <a:solidFill>
+          <a:srgbClr val="FFFFFF"/>
+        </a:solidFill>
+      </p:bgPr>
+    </p:bg>
+    <p:spTree>
+      <p:nvGrpSpPr>
+        <p:cNvPr id="1" name=""/>
+        <p:cNvGrpSpPr/>
+        <p:nvPr/>
+      </p:nvGrpSpPr>
+      <p:grpSpPr>
+        <a:xfrm>
+          <a:off x="0" y="0"/>
+          <a:ext cx="0" cy="0"/>
+          <a:chOff x="0" y="0"/>
+          <a:chExt cx="0" cy="0"/>
+        </a:xfrm>
+      </p:grpSpPr>
+      <p:sp>
+        <p:nvSpPr>
+          <p:cNvPr id="2" name="Text 0"/>
+          <p:cNvSpPr/>
+          <p:nvPr/>
+        </p:nvSpPr>
+        <p:spPr>
+          <a:xfrm>
+            <a:off x="0" y="0"/>
+            <a:ext cx="9144000" cy="101501"/>
+          </a:xfrm>
+          <a:prstGeom prst="rect">
+            <a:avLst/>
+          </a:prstGeom>
+          <a:solidFill>
+            <a:srgbClr val="277884"/>
+          </a:solidFill>
+          <a:ln/>
+        </p:spPr>
+        <p:txBody>
+          <a:bodyPr wrap="square" rtlCol="0" anchor="ctr"/>
+          <a:lstStyle/>
+          <a:p>
+            <a:pPr indent="0" marL="0">
+              <a:buNone/>
+            </a:pPr>
+            <a:endParaRPr lang="en-US" dirty="0"/>
+          </a:p>
+        </p:txBody>
+      </p:sp>
+      <p:sp>
+        <p:nvSpPr>
+          <p:cNvPr id="3" name="Text 1"/>
+          <p:cNvSpPr/>
+          <p:nvPr/>
+        </p:nvSpPr>
+        <p:spPr>
+          <a:xfrm>
+            <a:off x="406301" y="457051"/>
+            <a:ext cx="8498026" cy="274290"/>
+          </a:xfrm>
+          <a:prstGeom prst="rect">
+            <a:avLst/>
+          </a:prstGeom>
+          <a:noFill/>
+          <a:ln/>
+        </p:spPr>
+        <p:txBody>
+          <a:bodyPr wrap="square" lIns="0" tIns="0" rIns="0" bIns="0" rtlCol="0" anchor="t"/>
+          <a:lstStyle/>
+          <a:p>
+            <a:pPr algn="l" indent="0" marL="0">
+              <a:lnSpc>
+                <a:spcPts val="2160"/>
+              </a:lnSpc>
+              <a:spcBef>
+                <a:spcPts val="600"/>
+              </a:spcBef>
+              <a:spcAft>
+                <a:spcPts val="800"/>
+              </a:spcAft>
+              <a:buNone/>
+            </a:pPr>
+            <a:r>
+              <a:rPr lang="en-US" sz="1800" b="1" dirty="0">
+                <a:solidFill>
+                  <a:srgbClr val="FE4447"/>
+                </a:solidFill>
+                <a:latin typeface="Georgia" pitchFamily="34" charset="0"/>
+                <a:ea typeface="Georgia" pitchFamily="34" charset="-122"/>
+                <a:cs typeface="Georgia" pitchFamily="34" charset="-120"/>
+              </a:rPr>
+              <a:t>Wrap-up</a:t>
+            </a:r>
+            <a:endParaRPr lang="en-US" sz="1800" dirty="0"/>
+          </a:p>
+        </p:txBody>
+      </p:sp>
+      <p:sp>
+        <p:nvSpPr>
+          <p:cNvPr id="4" name="Text 2"/>
+          <p:cNvSpPr/>
+          <p:nvPr/>
+        </p:nvSpPr>
+        <p:spPr>
+          <a:xfrm>
+            <a:off x="634901" y="883593"/>
+            <a:ext cx="8102798" cy="1142702"/>
+          </a:xfrm>
+          <a:prstGeom prst="rect">
+            <a:avLst/>
+          </a:prstGeom>
+          <a:noFill/>
+          <a:ln/>
+        </p:spPr>
+        <p:txBody>
+          <a:bodyPr wrap="square" lIns="0" tIns="0" rIns="0" bIns="0" rtlCol="0" anchor="t"/>
+          <a:lstStyle/>
+          <a:p>
+            <a:pPr algn="l" marL="342900" indent="-342900">
+              <a:lnSpc>
+                <a:spcPts val="1620"/>
+              </a:lnSpc>
+              <a:spcAft>
+                <a:spcPts val="300"/>
+              </a:spcAft>
+              <a:buSzPct val="100000"/>
+              <a:buChar char="•"/>
+            </a:pPr>
+            <a:r>
+              <a:rPr lang="en-US" sz="1200" dirty="0">
+                <a:solidFill>
+                  <a:srgbClr val="1C2833"/>
+                </a:solidFill>
+                <a:latin typeface="Arial" pitchFamily="34" charset="0"/>
+                <a:ea typeface="Arial" pitchFamily="34" charset="-122"/>
+                <a:cs typeface="Arial" pitchFamily="34" charset="-120"/>
+              </a:rPr>
+              <a:t>30 seconds, teacher: </a:t>
+            </a:r>
+            <a:pPr algn="l" indent="0" marL="0">
+              <a:lnSpc>
+                <a:spcPts val="1620"/>
+              </a:lnSpc>
+              <a:spcAft>
+                <a:spcPts val="300"/>
+              </a:spcAft>
+              <a:buNone/>
+            </a:pPr>
+            <a:r>
+              <a:rPr lang="en-US" sz="1200" i="1" dirty="0">
+                <a:solidFill>
+                  <a:srgbClr val="1C2833"/>
+                </a:solidFill>
+                <a:latin typeface="Arial" pitchFamily="34" charset="0"/>
+                <a:ea typeface="Arial" pitchFamily="34" charset="-122"/>
+                <a:cs typeface="Arial" pitchFamily="34" charset="-120"/>
+              </a:rPr>
+              <a:t>"Two weeks ago, none of you could name the 12</a:t>
+            </a:r>
+            <a:pPr algn="l" indent="0" marL="0">
+              <a:lnSpc>
+                <a:spcPts val="1620"/>
+              </a:lnSpc>
+              <a:spcAft>
+                <a:spcPts val="300"/>
+              </a:spcAft>
+              <a:buNone/>
+            </a:pPr>
+            <a:r>
+              <a:rPr lang="en-US" sz="1200" dirty="0">
+                <a:solidFill>
+                  <a:srgbClr val="1C2833"/>
+                </a:solidFill>
+                <a:latin typeface="Arial" pitchFamily="34" charset="0"/>
+                <a:ea typeface="Arial" pitchFamily="34" charset="-122"/>
+                <a:cs typeface="Arial" pitchFamily="34" charset="-120"/>
+              </a:rPr>
+              <a:t>rāśis</a:t>
+            </a:r>
+            <a:pPr algn="l" indent="0" marL="0">
+              <a:lnSpc>
+                <a:spcPts val="1620"/>
+              </a:lnSpc>
+              <a:spcAft>
+                <a:spcPts val="300"/>
+              </a:spcAft>
+              <a:buNone/>
+            </a:pPr>
+            <a:r>
+              <a:rPr lang="en-US" sz="1200" i="1" dirty="0">
+                <a:solidFill>
+                  <a:srgbClr val="1C2833"/>
+                </a:solidFill>
+                <a:latin typeface="Arial" pitchFamily="34" charset="0"/>
+                <a:ea typeface="Arial" pitchFamily="34" charset="-122"/>
+                <a:cs typeface="Arial" pitchFamily="34" charset="-120"/>
+              </a:rPr>
+              <a:t>. Today, all of you can — and you understand why </a:t>
+            </a:r>
+            <a:pPr algn="l" indent="0" marL="0">
+              <a:lnSpc>
+                <a:spcPts val="1620"/>
+              </a:lnSpc>
+              <a:spcAft>
+                <a:spcPts val="300"/>
+              </a:spcAft>
+              <a:buNone/>
+            </a:pPr>
+            <a:r>
+              <a:rPr lang="en-US" sz="1200" b="1" i="1" dirty="0">
+                <a:solidFill>
+                  <a:srgbClr val="1C2833"/>
+                </a:solidFill>
+                <a:latin typeface="Arial" pitchFamily="34" charset="0"/>
+                <a:ea typeface="Arial" pitchFamily="34" charset="-122"/>
+                <a:cs typeface="Arial" pitchFamily="34" charset="-120"/>
+              </a:rPr>
+              <a:t>Makara Saṁkrānti</a:t>
+            </a:r>
+            <a:pPr algn="l" indent="0" marL="0">
+              <a:lnSpc>
+                <a:spcPts val="1620"/>
+              </a:lnSpc>
+              <a:spcAft>
+                <a:spcPts val="300"/>
+              </a:spcAft>
+              <a:buNone/>
+            </a:pPr>
+            <a:r>
+              <a:rPr lang="en-US" sz="1200" i="1" dirty="0">
+                <a:solidFill>
+                  <a:srgbClr val="1C2833"/>
+                </a:solidFill>
+                <a:latin typeface="Arial" pitchFamily="34" charset="0"/>
+                <a:ea typeface="Arial" pitchFamily="34" charset="-122"/>
+                <a:cs typeface="Arial" pitchFamily="34" charset="-120"/>
+              </a:rPr>
+              <a:t> is on January 14 and not December 21. That's astronomical literacy that took the Indian tradition centuries to build. You built it in 10 days. Well done."</a:t>
+            </a:r>
+            <a:endParaRPr lang="en-US" sz="1200" dirty="0"/>
+          </a:p>
+          <a:p>
+            <a:pPr algn="l" marL="342900" indent="-342900">
+              <a:lnSpc>
+                <a:spcPts val="1620"/>
+              </a:lnSpc>
+              <a:spcAft>
+                <a:spcPts val="300"/>
+              </a:spcAft>
+              <a:buSzPct val="100000"/>
+              <a:buChar char="•"/>
+            </a:pPr>
+            <a:r>
+              <a:rPr lang="en-US" sz="1200" dirty="0">
+                <a:solidFill>
+                  <a:srgbClr val="1C2833"/>
+                </a:solidFill>
+                <a:latin typeface="Arial" pitchFamily="34" charset="0"/>
+                <a:ea typeface="Arial" pitchFamily="34" charset="-122"/>
+                <a:cs typeface="Arial" pitchFamily="34" charset="-120"/>
+              </a:rPr>
+              <a:t>Closing prompt: </a:t>
+            </a:r>
+            <a:pPr algn="l" indent="0" marL="0">
+              <a:lnSpc>
+                <a:spcPts val="1620"/>
+              </a:lnSpc>
+              <a:spcAft>
+                <a:spcPts val="300"/>
+              </a:spcAft>
+              <a:buNone/>
+            </a:pPr>
+            <a:r>
+              <a:rPr lang="en-US" sz="1200" i="1" dirty="0">
+                <a:solidFill>
+                  <a:srgbClr val="1C2833"/>
+                </a:solidFill>
+                <a:latin typeface="Arial" pitchFamily="34" charset="0"/>
+                <a:ea typeface="Arial" pitchFamily="34" charset="-122"/>
+                <a:cs typeface="Arial" pitchFamily="34" charset="-120"/>
+              </a:rPr>
+              <a:t>"Tomorrow morning, when you walk to school, notice which way the Sun is rising. You'll find yourself looking for it. That's the habit this module was after."</a:t>
+            </a:r>
+            <a:endParaRPr lang="en-US" sz="1200" dirty="0"/>
+          </a:p>
+        </p:txBody>
+      </p:sp>
+      <p:sp>
+        <p:nvSpPr>
+          <p:cNvPr id="5" name="Text 3"/>
+          <p:cNvSpPr/>
+          <p:nvPr/>
+        </p:nvSpPr>
+        <p:spPr>
+          <a:xfrm>
+            <a:off x="406301" y="4434929"/>
+            <a:ext cx="8498026" cy="213271"/>
+          </a:xfrm>
+          <a:prstGeom prst="rect">
+            <a:avLst/>
+          </a:prstGeom>
+          <a:noFill/>
+          <a:ln/>
+        </p:spPr>
+        <p:txBody>
+          <a:bodyPr wrap="square" lIns="0" tIns="0" rIns="0" bIns="0" rtlCol="0" anchor="t"/>
+          <a:lstStyle/>
+          <a:p>
+            <a:pPr algn="l" indent="0" marL="0">
+              <a:lnSpc>
+                <a:spcPts val="1680"/>
+              </a:lnSpc>
+              <a:spcBef>
+                <a:spcPts val="300"/>
+              </a:spcBef>
+              <a:spcAft>
+                <a:spcPts val="300"/>
+              </a:spcAft>
+              <a:buNone/>
+            </a:pPr>
+            <a:r>
+              <a:rPr lang="en-US" sz="1200" dirty="0">
+                <a:solidFill>
+                  <a:srgbClr val="1C2833"/>
+                </a:solidFill>
+                <a:latin typeface="Arial" pitchFamily="34" charset="0"/>
+                <a:ea typeface="Arial" pitchFamily="34" charset="-122"/>
+                <a:cs typeface="Arial" pitchFamily="34" charset="-120"/>
+              </a:rPr>
+              <a:t>Middle ·  · IKS Curriculum</a:t>
+            </a:r>
+            <a:endParaRPr lang="en-US" sz="1200" dirty="0"/>
+          </a:p>
+        </p:txBody>
+      </p:sp>
+    </p:spTree>
+  </p:cSld>
+  <p:clrMapOvr>
+    <a:masterClrMapping/>
+  </p:clrMapOvr>
+</p:sld>
+</file>
+
+<file path=ppt/slides/slide13.xml><?xml version="1.0" encoding="utf-8"?>
+<p:sld xmlns:a="http://schemas.openxmlformats.org/drawingml/2006/main" xmlns:r="http://schemas.openxmlformats.org/officeDocument/2006/relationships" xmlns:p="http://schemas.openxmlformats.org/presentationml/2006/main">
+  <p:cSld name="Slide 13">
+    <p:bg>
+      <p:bgPr>
+        <a:solidFill>
+          <a:srgbClr val="FFFFFF"/>
+        </a:solidFill>
+      </p:bgPr>
+    </p:bg>
+    <p:spTree>
+      <p:nvGrpSpPr>
+        <p:cNvPr id="1" name=""/>
+        <p:cNvGrpSpPr/>
+        <p:nvPr/>
+      </p:nvGrpSpPr>
+      <p:grpSpPr>
+        <a:xfrm>
+          <a:off x="0" y="0"/>
+          <a:ext cx="0" cy="0"/>
+          <a:chOff x="0" y="0"/>
+          <a:chExt cx="0" cy="0"/>
+        </a:xfrm>
+      </p:grpSpPr>
+      <p:sp>
+        <p:nvSpPr>
+          <p:cNvPr id="2" name="Text 0"/>
+          <p:cNvSpPr/>
+          <p:nvPr/>
+        </p:nvSpPr>
+        <p:spPr>
+          <a:xfrm>
+            <a:off x="0" y="0"/>
+            <a:ext cx="9144000" cy="101501"/>
+          </a:xfrm>
+          <a:prstGeom prst="rect">
+            <a:avLst/>
+          </a:prstGeom>
+          <a:solidFill>
+            <a:srgbClr val="277884"/>
+          </a:solidFill>
+          <a:ln/>
+        </p:spPr>
+        <p:txBody>
+          <a:bodyPr wrap="square" rtlCol="0" anchor="ctr"/>
+          <a:lstStyle/>
+          <a:p>
+            <a:pPr indent="0" marL="0">
+              <a:buNone/>
+            </a:pPr>
+            <a:endParaRPr lang="en-US" dirty="0"/>
+          </a:p>
+        </p:txBody>
+      </p:sp>
+      <p:sp>
+        <p:nvSpPr>
+          <p:cNvPr id="3" name="Text 1"/>
+          <p:cNvSpPr/>
+          <p:nvPr/>
+        </p:nvSpPr>
+        <p:spPr>
+          <a:xfrm>
+            <a:off x="406301" y="457051"/>
+            <a:ext cx="8498026" cy="274290"/>
+          </a:xfrm>
+          <a:prstGeom prst="rect">
+            <a:avLst/>
+          </a:prstGeom>
+          <a:noFill/>
+          <a:ln/>
+        </p:spPr>
+        <p:txBody>
+          <a:bodyPr wrap="square" lIns="0" tIns="0" rIns="0" bIns="0" rtlCol="0" anchor="t"/>
+          <a:lstStyle/>
+          <a:p>
+            <a:pPr algn="l" indent="0" marL="0">
+              <a:lnSpc>
+                <a:spcPts val="2160"/>
+              </a:lnSpc>
+              <a:spcBef>
+                <a:spcPts val="600"/>
+              </a:spcBef>
+              <a:spcAft>
+                <a:spcPts val="800"/>
+              </a:spcAft>
+              <a:buNone/>
+            </a:pPr>
+            <a:r>
+              <a:rPr lang="en-US" sz="1800" b="1" dirty="0">
+                <a:solidFill>
+                  <a:srgbClr val="FE4447"/>
+                </a:solidFill>
+                <a:latin typeface="Georgia" pitchFamily="34" charset="0"/>
+                <a:ea typeface="Georgia" pitchFamily="34" charset="-122"/>
+                <a:cs typeface="Georgia" pitchFamily="34" charset="-120"/>
+              </a:rPr>
+              <a:t>Citation(s) used in this lesson</a:t>
+            </a:r>
+            <a:endParaRPr lang="en-US" sz="1800" dirty="0"/>
+          </a:p>
+        </p:txBody>
+      </p:sp>
+      <p:sp>
+        <p:nvSpPr>
+          <p:cNvPr id="4" name="Text 2"/>
+          <p:cNvSpPr/>
+          <p:nvPr/>
+        </p:nvSpPr>
+        <p:spPr>
+          <a:xfrm>
+            <a:off x="634901" y="883593"/>
+            <a:ext cx="8102798" cy="281880"/>
+          </a:xfrm>
+          <a:prstGeom prst="rect">
+            <a:avLst/>
+          </a:prstGeom>
+          <a:noFill/>
+          <a:ln/>
+        </p:spPr>
+        <p:txBody>
+          <a:bodyPr wrap="square" lIns="0" tIns="0" rIns="0" bIns="0" rtlCol="0" anchor="t"/>
+          <a:lstStyle/>
+          <a:p>
+            <a:pPr algn="l" marL="342900" indent="-342900">
+              <a:lnSpc>
+                <a:spcPts val="1620"/>
+              </a:lnSpc>
+              <a:spcAft>
+                <a:spcPts val="300"/>
+              </a:spcAft>
+              <a:buSzPct val="100000"/>
+              <a:buChar char="•"/>
+            </a:pPr>
+            <a:r>
+              <a:rPr lang="en-US" sz="1200" dirty="0">
+                <a:solidFill>
+                  <a:srgbClr val="1C2833"/>
+                </a:solidFill>
+                <a:latin typeface="Arial" pitchFamily="34" charset="0"/>
+                <a:ea typeface="Arial" pitchFamily="34" charset="-122"/>
+                <a:cs typeface="Arial" pitchFamily="34" charset="-120"/>
+              </a:rPr>
+              <a:t>All citations were addressed in earlier days. No new citations introduced today.</a:t>
+            </a:r>
+            <a:endParaRPr lang="en-US" sz="1200" dirty="0"/>
+          </a:p>
+        </p:txBody>
+      </p:sp>
+      <p:sp>
+        <p:nvSpPr>
+          <p:cNvPr id="5" name="Text 3"/>
+          <p:cNvSpPr/>
+          <p:nvPr/>
+        </p:nvSpPr>
+        <p:spPr>
+          <a:xfrm>
+            <a:off x="406301" y="4434929"/>
+            <a:ext cx="8498026" cy="213271"/>
+          </a:xfrm>
+          <a:prstGeom prst="rect">
+            <a:avLst/>
+          </a:prstGeom>
+          <a:noFill/>
+          <a:ln/>
+        </p:spPr>
+        <p:txBody>
+          <a:bodyPr wrap="square" lIns="0" tIns="0" rIns="0" bIns="0" rtlCol="0" anchor="t"/>
+          <a:lstStyle/>
+          <a:p>
+            <a:pPr algn="l" indent="0" marL="0">
+              <a:lnSpc>
+                <a:spcPts val="1680"/>
+              </a:lnSpc>
+              <a:spcBef>
+                <a:spcPts val="300"/>
+              </a:spcBef>
+              <a:spcAft>
+                <a:spcPts val="300"/>
+              </a:spcAft>
+              <a:buNone/>
+            </a:pPr>
+            <a:r>
+              <a:rPr lang="en-US" sz="1200" dirty="0">
+                <a:solidFill>
+                  <a:srgbClr val="1C2833"/>
+                </a:solidFill>
+                <a:latin typeface="Arial" pitchFamily="34" charset="0"/>
+                <a:ea typeface="Arial" pitchFamily="34" charset="-122"/>
+                <a:cs typeface="Arial" pitchFamily="34" charset="-120"/>
+              </a:rPr>
+              <a:t>Middle ·  · IKS Curriculum</a:t>
+            </a:r>
+            <a:endParaRPr lang="en-US" sz="1200" dirty="0"/>
+          </a:p>
+        </p:txBody>
+      </p:sp>
+    </p:spTree>
+  </p:cSld>
+  <p:clrMapOvr>
+    <a:masterClrMapping/>
+  </p:clrMapOvr>
+</p:sld>
+</file>
+
+<file path=ppt/slides/slide14.xml><?xml version="1.0" encoding="utf-8"?>
+<p:sld xmlns:a="http://schemas.openxmlformats.org/drawingml/2006/main" xmlns:r="http://schemas.openxmlformats.org/officeDocument/2006/relationships" xmlns:p="http://schemas.openxmlformats.org/presentationml/2006/main">
+  <p:cSld name="Slide 14">
+    <p:bg>
+      <p:bgPr>
+        <a:solidFill>
+          <a:srgbClr val="FFFFFF"/>
+        </a:solidFill>
+      </p:bgPr>
+    </p:bg>
+    <p:spTree>
+      <p:nvGrpSpPr>
+        <p:cNvPr id="1" name=""/>
+        <p:cNvGrpSpPr/>
+        <p:nvPr/>
+      </p:nvGrpSpPr>
+      <p:grpSpPr>
+        <a:xfrm>
+          <a:off x="0" y="0"/>
+          <a:ext cx="0" cy="0"/>
+          <a:chOff x="0" y="0"/>
+          <a:chExt cx="0" cy="0"/>
+        </a:xfrm>
+      </p:grpSpPr>
+      <p:sp>
+        <p:nvSpPr>
+          <p:cNvPr id="2" name="Text 0"/>
+          <p:cNvSpPr/>
+          <p:nvPr/>
+        </p:nvSpPr>
+        <p:spPr>
+          <a:xfrm>
+            <a:off x="0" y="0"/>
+            <a:ext cx="9144000" cy="101501"/>
+          </a:xfrm>
+          <a:prstGeom prst="rect">
+            <a:avLst/>
+          </a:prstGeom>
+          <a:solidFill>
+            <a:srgbClr val="277884"/>
+          </a:solidFill>
+          <a:ln/>
+        </p:spPr>
+        <p:txBody>
+          <a:bodyPr wrap="square" rtlCol="0" anchor="ctr"/>
+          <a:lstStyle/>
+          <a:p>
+            <a:pPr indent="0" marL="0">
+              <a:buNone/>
+            </a:pPr>
+            <a:endParaRPr lang="en-US" dirty="0"/>
+          </a:p>
+        </p:txBody>
+      </p:sp>
+      <p:sp>
+        <p:nvSpPr>
+          <p:cNvPr id="3" name="Text 1"/>
+          <p:cNvSpPr/>
+          <p:nvPr/>
+        </p:nvSpPr>
+        <p:spPr>
+          <a:xfrm>
+            <a:off x="406301" y="457051"/>
+            <a:ext cx="8498026" cy="274290"/>
+          </a:xfrm>
+          <a:prstGeom prst="rect">
+            <a:avLst/>
+          </a:prstGeom>
+          <a:noFill/>
+          <a:ln/>
+        </p:spPr>
+        <p:txBody>
+          <a:bodyPr wrap="square" lIns="0" tIns="0" rIns="0" bIns="0" rtlCol="0" anchor="t"/>
+          <a:lstStyle/>
+          <a:p>
+            <a:pPr algn="l" indent="0" marL="0">
+              <a:lnSpc>
+                <a:spcPts val="2160"/>
+              </a:lnSpc>
+              <a:spcBef>
+                <a:spcPts val="600"/>
+              </a:spcBef>
+              <a:spcAft>
+                <a:spcPts val="800"/>
+              </a:spcAft>
+              <a:buNone/>
+            </a:pPr>
+            <a:r>
+              <a:rPr lang="en-US" sz="1800" b="1" dirty="0">
+                <a:solidFill>
+                  <a:srgbClr val="FE4447"/>
+                </a:solidFill>
+                <a:latin typeface="Georgia" pitchFamily="34" charset="0"/>
+                <a:ea typeface="Georgia" pitchFamily="34" charset="-122"/>
+                <a:cs typeface="Georgia" pitchFamily="34" charset="-120"/>
+              </a:rPr>
               <a:t>Differentiation</a:t>
             </a:r>
             <a:endParaRPr lang="en-US" sz="1800" dirty="0"/>
@@ -2811,7 +4110,7 @@
                 <a:ea typeface="Georgia" pitchFamily="34" charset="-122"/>
                 <a:cs typeface="Georgia" pitchFamily="34" charset="-120"/>
               </a:rPr>
-              <a:t>Materials</a:t>
+              <a:t>Learning objective</a:t>
             </a:r>
             <a:endParaRPr lang="en-US" sz="1800" dirty="0"/>
           </a:p>
@@ -2826,7 +4125,7 @@
         <p:spPr>
           <a:xfrm>
             <a:off x="406301" y="870942"/>
-            <a:ext cx="8498026" cy="436066"/>
+            <a:ext cx="8498026" cy="426541"/>
           </a:xfrm>
           <a:prstGeom prst="rect">
             <a:avLst/>
@@ -2859,7 +4158,7 @@
                 <a:ea typeface="Arial" pitchFamily="34" charset="-122"/>
                 <a:cs typeface="Arial" pitchFamily="34" charset="-120"/>
               </a:rPr>
-              <a:t>– Printed summative quiz, one per student (</a:t>
+              <a:t>By the end of this session, the module is closed: the summative quiz is sat, the </a:t>
             </a:r>
             <a:pPr algn="l" indent="0" marL="0">
               <a:lnSpc>
@@ -2874,6 +4173,29 @@
               <a:buNone/>
             </a:pPr>
             <a:r>
+              <a:rPr lang="en-US" sz="1200" i="1" dirty="0">
+                <a:solidFill>
+                  <a:srgbClr val="1C2833"/>
+                </a:solidFill>
+                <a:latin typeface="Arial" pitchFamily="34" charset="0"/>
+                <a:ea typeface="Arial" pitchFamily="34" charset="-122"/>
+                <a:cs typeface="Arial" pitchFamily="34" charset="-120"/>
+              </a:rPr>
+              <a:t>rāśi</a:t>
+            </a:r>
+            <a:pPr algn="l" indent="0" marL="0">
+              <a:lnSpc>
+                <a:spcPts val="1680"/>
+              </a:lnSpc>
+              <a:spcBef>
+                <a:spcPts val="300"/>
+              </a:spcBef>
+              <a:spcAft>
+                <a:spcPts val="300"/>
+              </a:spcAft>
+              <a:buNone/>
+            </a:pPr>
+            <a:r>
               <a:rPr lang="en-US" sz="1200" dirty="0">
                 <a:solidFill>
                   <a:srgbClr val="1C2833"/>
@@ -2882,122 +4204,7 @@
                 <a:ea typeface="Arial" pitchFamily="34" charset="-122"/>
                 <a:cs typeface="Arial" pitchFamily="34" charset="-120"/>
               </a:rPr>
-              <a:t>quizzes/summative.md</a:t>
-            </a:r>
-            <a:pPr algn="l" indent="0" marL="0">
-              <a:lnSpc>
-                <a:spcPts val="1680"/>
-              </a:lnSpc>
-              <a:spcBef>
-                <a:spcPts val="300"/>
-              </a:spcBef>
-              <a:spcAft>
-                <a:spcPts val="300"/>
-              </a:spcAft>
-              <a:buNone/>
-            </a:pPr>
-            <a:r>
-              <a:rPr lang="en-US" sz="1200" dirty="0">
-                <a:solidFill>
-                  <a:srgbClr val="1C2833"/>
-                </a:solidFill>
-                <a:latin typeface="Arial" pitchFamily="34" charset="0"/>
-                <a:ea typeface="Arial" pitchFamily="34" charset="-122"/>
-                <a:cs typeface="Arial" pitchFamily="34" charset="-120"/>
-              </a:rPr>
-              <a:t>) – The rubric (</a:t>
-            </a:r>
-            <a:pPr algn="l" indent="0" marL="0">
-              <a:lnSpc>
-                <a:spcPts val="1680"/>
-              </a:lnSpc>
-              <a:spcBef>
-                <a:spcPts val="300"/>
-              </a:spcBef>
-              <a:spcAft>
-                <a:spcPts val="300"/>
-              </a:spcAft>
-              <a:buNone/>
-            </a:pPr>
-            <a:r>
-              <a:rPr lang="en-US" sz="1200" dirty="0">
-                <a:solidFill>
-                  <a:srgbClr val="1C2833"/>
-                </a:solidFill>
-                <a:latin typeface="Arial" pitchFamily="34" charset="0"/>
-                <a:ea typeface="Arial" pitchFamily="34" charset="-122"/>
-                <a:cs typeface="Arial" pitchFamily="34" charset="-120"/>
-              </a:rPr>
-              <a:t>assessments/rubric.md</a:t>
-            </a:r>
-            <a:pPr algn="l" indent="0" marL="0">
-              <a:lnSpc>
-                <a:spcPts val="1680"/>
-              </a:lnSpc>
-              <a:spcBef>
-                <a:spcPts val="300"/>
-              </a:spcBef>
-              <a:spcAft>
-                <a:spcPts val="300"/>
-              </a:spcAft>
-              <a:buNone/>
-            </a:pPr>
-            <a:r>
-              <a:rPr lang="en-US" sz="1200" dirty="0">
-                <a:solidFill>
-                  <a:srgbClr val="1C2833"/>
-                </a:solidFill>
-                <a:latin typeface="Arial" pitchFamily="34" charset="0"/>
-                <a:ea typeface="Arial" pitchFamily="34" charset="-122"/>
-                <a:cs typeface="Arial" pitchFamily="34" charset="-120"/>
-              </a:rPr>
-              <a:t>) – A wall / pinboard for the </a:t>
-            </a:r>
-            <a:pPr algn="l" indent="0" marL="0">
-              <a:lnSpc>
-                <a:spcPts val="1680"/>
-              </a:lnSpc>
-              <a:spcBef>
-                <a:spcPts val="300"/>
-              </a:spcBef>
-              <a:spcAft>
-                <a:spcPts val="300"/>
-              </a:spcAft>
-              <a:buNone/>
-            </a:pPr>
-            <a:r>
-              <a:rPr lang="en-US" sz="1200" i="1" dirty="0">
-                <a:solidFill>
-                  <a:srgbClr val="1C2833"/>
-                </a:solidFill>
-                <a:latin typeface="Arial" pitchFamily="34" charset="0"/>
-                <a:ea typeface="Arial" pitchFamily="34" charset="-122"/>
-                <a:cs typeface="Arial" pitchFamily="34" charset="-120"/>
-              </a:rPr>
-              <a:t>rāśi</a:t>
-            </a:r>
-            <a:pPr algn="l" indent="0" marL="0">
-              <a:lnSpc>
-                <a:spcPts val="1680"/>
-              </a:lnSpc>
-              <a:spcBef>
-                <a:spcPts val="300"/>
-              </a:spcBef>
-              <a:spcAft>
-                <a:spcPts val="300"/>
-              </a:spcAft>
-              <a:buNone/>
-            </a:pPr>
-            <a:r>
-              <a:rPr lang="en-US" sz="1200" dirty="0">
-                <a:solidFill>
-                  <a:srgbClr val="1C2833"/>
-                </a:solidFill>
-                <a:latin typeface="Arial" pitchFamily="34" charset="0"/>
-                <a:ea typeface="Arial" pitchFamily="34" charset="-122"/>
-                <a:cs typeface="Arial" pitchFamily="34" charset="-120"/>
-              </a:rPr>
-              <a:t>-wheel display – A stopwatch / timer – Reflection slips (paper)</a:t>
+              <a:t>-wheel projects are presented to peers, and reflection slips are submitted.</a:t>
             </a:r>
             <a:endParaRPr lang="en-US" sz="1200" dirty="0"/>
           </a:p>
@@ -3155,7 +4362,7 @@
                 <a:ea typeface="Georgia" pitchFamily="34" charset="-122"/>
                 <a:cs typeface="Georgia" pitchFamily="34" charset="-120"/>
               </a:rPr>
-              <a:t>Lesson flow</a:t>
+              <a:t>Materials</a:t>
             </a:r>
             <a:endParaRPr lang="en-US" sz="1800" dirty="0"/>
           </a:p>
@@ -3164,6 +4371,268 @@
       <p:sp>
         <p:nvSpPr>
           <p:cNvPr id="4" name="Text 2"/>
+          <p:cNvSpPr/>
+          <p:nvPr/>
+        </p:nvSpPr>
+        <p:spPr>
+          <a:xfrm>
+            <a:off x="634901" y="883593"/>
+            <a:ext cx="8102798" cy="1295102"/>
+          </a:xfrm>
+          <a:prstGeom prst="rect">
+            <a:avLst/>
+          </a:prstGeom>
+          <a:noFill/>
+          <a:ln/>
+        </p:spPr>
+        <p:txBody>
+          <a:bodyPr wrap="square" lIns="0" tIns="0" rIns="0" bIns="0" rtlCol="0" anchor="t"/>
+          <a:lstStyle/>
+          <a:p>
+            <a:pPr algn="l" marL="342900" indent="-342900">
+              <a:lnSpc>
+                <a:spcPts val="1620"/>
+              </a:lnSpc>
+              <a:spcAft>
+                <a:spcPts val="300"/>
+              </a:spcAft>
+              <a:buSzPct val="100000"/>
+              <a:buChar char="•"/>
+            </a:pPr>
+            <a:r>
+              <a:rPr lang="en-US" sz="1200" dirty="0">
+                <a:solidFill>
+                  <a:srgbClr val="1C2833"/>
+                </a:solidFill>
+                <a:latin typeface="Arial" pitchFamily="34" charset="0"/>
+                <a:ea typeface="Arial" pitchFamily="34" charset="-122"/>
+                <a:cs typeface="Arial" pitchFamily="34" charset="-120"/>
+              </a:rPr>
+              <a:t>Printed summative quiz, one per student (</a:t>
+            </a:r>
+            <a:pPr algn="l" indent="0" marL="0">
+              <a:lnSpc>
+                <a:spcPts val="1620"/>
+              </a:lnSpc>
+              <a:spcAft>
+                <a:spcPts val="300"/>
+              </a:spcAft>
+              <a:buNone/>
+            </a:pPr>
+            <a:r>
+              <a:rPr lang="en-US" sz="1200" dirty="0">
+                <a:solidFill>
+                  <a:srgbClr val="1C2833"/>
+                </a:solidFill>
+                <a:latin typeface="Arial" pitchFamily="34" charset="0"/>
+                <a:ea typeface="Arial" pitchFamily="34" charset="-122"/>
+                <a:cs typeface="Arial" pitchFamily="34" charset="-120"/>
+              </a:rPr>
+              <a:t>quizzes/summative.md</a:t>
+            </a:r>
+            <a:pPr algn="l" indent="0" marL="0">
+              <a:lnSpc>
+                <a:spcPts val="1620"/>
+              </a:lnSpc>
+              <a:spcAft>
+                <a:spcPts val="300"/>
+              </a:spcAft>
+              <a:buNone/>
+            </a:pPr>
+            <a:r>
+              <a:rPr lang="en-US" sz="1200" dirty="0">
+                <a:solidFill>
+                  <a:srgbClr val="1C2833"/>
+                </a:solidFill>
+                <a:latin typeface="Arial" pitchFamily="34" charset="0"/>
+                <a:ea typeface="Arial" pitchFamily="34" charset="-122"/>
+                <a:cs typeface="Arial" pitchFamily="34" charset="-120"/>
+              </a:rPr>
+              <a:t>)</a:t>
+            </a:r>
+            <a:endParaRPr lang="en-US" sz="1200" dirty="0"/>
+          </a:p>
+          <a:p>
+            <a:pPr algn="l" marL="342900" indent="-342900">
+              <a:lnSpc>
+                <a:spcPts val="1620"/>
+              </a:lnSpc>
+              <a:spcAft>
+                <a:spcPts val="300"/>
+              </a:spcAft>
+              <a:buSzPct val="100000"/>
+              <a:buChar char="•"/>
+            </a:pPr>
+            <a:r>
+              <a:rPr lang="en-US" sz="1200" dirty="0">
+                <a:solidFill>
+                  <a:srgbClr val="1C2833"/>
+                </a:solidFill>
+                <a:latin typeface="Arial" pitchFamily="34" charset="0"/>
+                <a:ea typeface="Arial" pitchFamily="34" charset="-122"/>
+                <a:cs typeface="Arial" pitchFamily="34" charset="-120"/>
+              </a:rPr>
+              <a:t>The rubric (</a:t>
+            </a:r>
+            <a:pPr algn="l" indent="0" marL="0">
+              <a:lnSpc>
+                <a:spcPts val="1620"/>
+              </a:lnSpc>
+              <a:spcAft>
+                <a:spcPts val="300"/>
+              </a:spcAft>
+              <a:buNone/>
+            </a:pPr>
+            <a:r>
+              <a:rPr lang="en-US" sz="1200" dirty="0">
+                <a:solidFill>
+                  <a:srgbClr val="1C2833"/>
+                </a:solidFill>
+                <a:latin typeface="Arial" pitchFamily="34" charset="0"/>
+                <a:ea typeface="Arial" pitchFamily="34" charset="-122"/>
+                <a:cs typeface="Arial" pitchFamily="34" charset="-120"/>
+              </a:rPr>
+              <a:t>assessments/rubric.md</a:t>
+            </a:r>
+            <a:pPr algn="l" indent="0" marL="0">
+              <a:lnSpc>
+                <a:spcPts val="1620"/>
+              </a:lnSpc>
+              <a:spcAft>
+                <a:spcPts val="300"/>
+              </a:spcAft>
+              <a:buNone/>
+            </a:pPr>
+            <a:r>
+              <a:rPr lang="en-US" sz="1200" dirty="0">
+                <a:solidFill>
+                  <a:srgbClr val="1C2833"/>
+                </a:solidFill>
+                <a:latin typeface="Arial" pitchFamily="34" charset="0"/>
+                <a:ea typeface="Arial" pitchFamily="34" charset="-122"/>
+                <a:cs typeface="Arial" pitchFamily="34" charset="-120"/>
+              </a:rPr>
+              <a:t>)</a:t>
+            </a:r>
+            <a:endParaRPr lang="en-US" sz="1200" dirty="0"/>
+          </a:p>
+          <a:p>
+            <a:pPr algn="l" marL="342900" indent="-342900">
+              <a:lnSpc>
+                <a:spcPts val="1620"/>
+              </a:lnSpc>
+              <a:spcAft>
+                <a:spcPts val="300"/>
+              </a:spcAft>
+              <a:buSzPct val="100000"/>
+              <a:buChar char="•"/>
+            </a:pPr>
+            <a:r>
+              <a:rPr lang="en-US" sz="1200" dirty="0">
+                <a:solidFill>
+                  <a:srgbClr val="1C2833"/>
+                </a:solidFill>
+                <a:latin typeface="Arial" pitchFamily="34" charset="0"/>
+                <a:ea typeface="Arial" pitchFamily="34" charset="-122"/>
+                <a:cs typeface="Arial" pitchFamily="34" charset="-120"/>
+              </a:rPr>
+              <a:t>A wall / pinboard for the </a:t>
+            </a:r>
+            <a:pPr algn="l" indent="0" marL="0">
+              <a:lnSpc>
+                <a:spcPts val="1620"/>
+              </a:lnSpc>
+              <a:spcAft>
+                <a:spcPts val="300"/>
+              </a:spcAft>
+              <a:buNone/>
+            </a:pPr>
+            <a:r>
+              <a:rPr lang="en-US" sz="1200" i="1" dirty="0">
+                <a:solidFill>
+                  <a:srgbClr val="1C2833"/>
+                </a:solidFill>
+                <a:latin typeface="Arial" pitchFamily="34" charset="0"/>
+                <a:ea typeface="Arial" pitchFamily="34" charset="-122"/>
+                <a:cs typeface="Arial" pitchFamily="34" charset="-120"/>
+              </a:rPr>
+              <a:t>rāśi</a:t>
+            </a:r>
+            <a:pPr algn="l" indent="0" marL="0">
+              <a:lnSpc>
+                <a:spcPts val="1620"/>
+              </a:lnSpc>
+              <a:spcAft>
+                <a:spcPts val="300"/>
+              </a:spcAft>
+              <a:buNone/>
+            </a:pPr>
+            <a:r>
+              <a:rPr lang="en-US" sz="1200" dirty="0">
+                <a:solidFill>
+                  <a:srgbClr val="1C2833"/>
+                </a:solidFill>
+                <a:latin typeface="Arial" pitchFamily="34" charset="0"/>
+                <a:ea typeface="Arial" pitchFamily="34" charset="-122"/>
+                <a:cs typeface="Arial" pitchFamily="34" charset="-120"/>
+              </a:rPr>
+              <a:t>-wheel display</a:t>
+            </a:r>
+            <a:endParaRPr lang="en-US" sz="1200" dirty="0"/>
+          </a:p>
+          <a:p>
+            <a:pPr algn="l" marL="342900" indent="-342900">
+              <a:lnSpc>
+                <a:spcPts val="1620"/>
+              </a:lnSpc>
+              <a:spcAft>
+                <a:spcPts val="300"/>
+              </a:spcAft>
+              <a:buSzPct val="100000"/>
+              <a:buChar char="•"/>
+            </a:pPr>
+            <a:r>
+              <a:rPr lang="en-US" sz="1200" dirty="0">
+                <a:solidFill>
+                  <a:srgbClr val="1C2833"/>
+                </a:solidFill>
+                <a:latin typeface="Arial" pitchFamily="34" charset="0"/>
+                <a:ea typeface="Arial" pitchFamily="34" charset="-122"/>
+                <a:cs typeface="Arial" pitchFamily="34" charset="-120"/>
+              </a:rPr>
+              <a:t>A stopwatch / timer</a:t>
+            </a:r>
+            <a:endParaRPr lang="en-US" sz="1200" dirty="0"/>
+          </a:p>
+          <a:p>
+            <a:pPr algn="l" marL="342900" indent="-342900">
+              <a:lnSpc>
+                <a:spcPts val="1620"/>
+              </a:lnSpc>
+              <a:spcAft>
+                <a:spcPts val="300"/>
+              </a:spcAft>
+              <a:buSzPct val="100000"/>
+              <a:buChar char="•"/>
+            </a:pPr>
+            <a:r>
+              <a:rPr lang="en-US" sz="1200" dirty="0">
+                <a:solidFill>
+                  <a:srgbClr val="1C2833"/>
+                </a:solidFill>
+                <a:latin typeface="Arial" pitchFamily="34" charset="0"/>
+                <a:ea typeface="Arial" pitchFamily="34" charset="-122"/>
+                <a:cs typeface="Arial" pitchFamily="34" charset="-120"/>
+              </a:rPr>
+              <a:t>Reflection slips (paper)</a:t>
+            </a:r>
+            <a:endParaRPr lang="en-US" sz="1200" dirty="0"/>
+          </a:p>
+        </p:txBody>
+      </p:sp>
+      <p:sp>
+        <p:nvSpPr>
+          <p:cNvPr id="5" name="Text 3"/>
           <p:cNvSpPr/>
           <p:nvPr/>
         </p:nvSpPr>
@@ -3313,7 +4782,7 @@
                 <a:ea typeface="Georgia" pitchFamily="34" charset="-122"/>
                 <a:cs typeface="Georgia" pitchFamily="34" charset="-120"/>
               </a:rPr>
-              <a:t>Summative quiz (20 min)</a:t>
+              <a:t>Lesson flow</a:t>
             </a:r>
             <a:endParaRPr lang="en-US" sz="1800" dirty="0"/>
           </a:p>
@@ -3322,54 +4791,6 @@
       <p:sp>
         <p:nvSpPr>
           <p:cNvPr id="4" name="Text 2"/>
-          <p:cNvSpPr/>
-          <p:nvPr/>
-        </p:nvSpPr>
-        <p:spPr>
-          <a:xfrm>
-            <a:off x="406301" y="870942"/>
-            <a:ext cx="8498026" cy="426541"/>
-          </a:xfrm>
-          <a:prstGeom prst="rect">
-            <a:avLst/>
-          </a:prstGeom>
-          <a:noFill/>
-          <a:ln/>
-        </p:spPr>
-        <p:txBody>
-          <a:bodyPr wrap="square" lIns="0" tIns="0" rIns="0" bIns="0" rtlCol="0" anchor="t"/>
-          <a:lstStyle/>
-          <a:p>
-            <a:pPr algn="l" indent="0" marL="0">
-              <a:lnSpc>
-                <a:spcPts val="1680"/>
-              </a:lnSpc>
-              <a:spcBef>
-                <a:spcPts val="300"/>
-              </a:spcBef>
-              <a:spcAft>
-                <a:spcPts val="300"/>
-              </a:spcAft>
-              <a:buNone/>
-            </a:pPr>
-            <a:r>
-              <a:rPr lang="en-US" sz="1200" dirty="0">
-                <a:solidFill>
-                  <a:srgbClr val="1C2833"/>
-                </a:solidFill>
-                <a:latin typeface="Arial" pitchFamily="34" charset="0"/>
-                <a:ea typeface="Arial" pitchFamily="34" charset="-122"/>
-                <a:cs typeface="Arial" pitchFamily="34" charset="-120"/>
-              </a:rPr>
-              <a:t>– Students sit individually for the printed quiz. – 15 minutes of work + 5 minutes of buffer. – Closed book. – Submit on the way out for the showcase.</a:t>
-            </a:r>
-            <a:endParaRPr lang="en-US" sz="1200" dirty="0"/>
-          </a:p>
-        </p:txBody>
-      </p:sp>
-      <p:sp>
-        <p:nvSpPr>
-          <p:cNvPr id="5" name="Text 3"/>
           <p:cNvSpPr/>
           <p:nvPr/>
         </p:nvSpPr>
@@ -3519,7 +4940,7 @@
                 <a:ea typeface="Georgia" pitchFamily="34" charset="-122"/>
                 <a:cs typeface="Georgia" pitchFamily="34" charset="-120"/>
               </a:rPr>
-              <a:t>Showcase (20 min)</a:t>
+              <a:t>Summative quiz (20 min)</a:t>
             </a:r>
             <a:endParaRPr lang="en-US" sz="1800" dirty="0"/>
           </a:p>
@@ -3533,8 +4954,8 @@
         </p:nvSpPr>
         <p:spPr>
           <a:xfrm>
-            <a:off x="406301" y="870942"/>
-            <a:ext cx="8498026" cy="639812"/>
+            <a:off x="634901" y="883593"/>
+            <a:ext cx="8102798" cy="1013222"/>
           </a:xfrm>
           <a:prstGeom prst="rect">
             <a:avLst/>
@@ -3546,17 +4967,15 @@
           <a:bodyPr wrap="square" lIns="0" tIns="0" rIns="0" bIns="0" rtlCol="0" anchor="t"/>
           <a:lstStyle/>
           <a:p>
-            <a:pPr algn="l" indent="0" marL="0">
-              <a:lnSpc>
-                <a:spcPts val="1680"/>
-              </a:lnSpc>
-              <a:spcBef>
-                <a:spcPts val="300"/>
-              </a:spcBef>
-              <a:spcAft>
-                <a:spcPts val="300"/>
-              </a:spcAft>
-              <a:buNone/>
+            <a:pPr algn="l" marL="342900" indent="-342900">
+              <a:lnSpc>
+                <a:spcPts val="1620"/>
+              </a:lnSpc>
+              <a:spcAft>
+                <a:spcPts val="300"/>
+              </a:spcAft>
+              <a:buSzPct val="100000"/>
+              <a:buChar char="•"/>
             </a:pPr>
             <a:r>
               <a:rPr lang="en-US" sz="1200" dirty="0">
@@ -3567,42 +4986,20 @@
                 <a:ea typeface="Arial" pitchFamily="34" charset="-122"/>
                 <a:cs typeface="Arial" pitchFamily="34" charset="-120"/>
               </a:rPr>
-              <a:t>– Pairs present their </a:t>
-            </a:r>
-            <a:pPr algn="l" indent="0" marL="0">
-              <a:lnSpc>
-                <a:spcPts val="1680"/>
-              </a:lnSpc>
-              <a:spcBef>
-                <a:spcPts val="300"/>
-              </a:spcBef>
-              <a:spcAft>
-                <a:spcPts val="300"/>
-              </a:spcAft>
-              <a:buNone/>
-            </a:pPr>
-            <a:r>
-              <a:rPr lang="en-US" sz="1200" i="1" dirty="0">
-                <a:solidFill>
-                  <a:srgbClr val="1C2833"/>
-                </a:solidFill>
-                <a:latin typeface="Arial" pitchFamily="34" charset="0"/>
-                <a:ea typeface="Arial" pitchFamily="34" charset="-122"/>
-                <a:cs typeface="Arial" pitchFamily="34" charset="-120"/>
-              </a:rPr>
-              <a:t>rāśi</a:t>
-            </a:r>
-            <a:pPr algn="l" indent="0" marL="0">
-              <a:lnSpc>
-                <a:spcPts val="1680"/>
-              </a:lnSpc>
-              <a:spcBef>
-                <a:spcPts val="300"/>
-              </a:spcBef>
-              <a:spcAft>
-                <a:spcPts val="300"/>
-              </a:spcAft>
-              <a:buNone/>
+              <a:t>Students sit individually for the printed quiz.</a:t>
+            </a:r>
+            <a:endParaRPr lang="en-US" sz="1200" dirty="0"/>
+          </a:p>
+          <a:p>
+            <a:pPr algn="l" marL="342900" indent="-342900">
+              <a:lnSpc>
+                <a:spcPts val="1620"/>
+              </a:lnSpc>
+              <a:spcAft>
+                <a:spcPts val="300"/>
+              </a:spcAft>
+              <a:buSzPct val="100000"/>
+              <a:buChar char="•"/>
             </a:pPr>
             <a:r>
               <a:rPr lang="en-US" sz="1200" dirty="0">
@@ -3613,63 +5010,63 @@
                 <a:ea typeface="Arial" pitchFamily="34" charset="-122"/>
                 <a:cs typeface="Arial" pitchFamily="34" charset="-120"/>
               </a:rPr>
-              <a:t>-wheel. – 3 minutes per pair (strict). 1 minute for Q&amp;A. – Teacher marks on the rubric during each presentation (5 min slot per pair). – Audience: the rest of the class. Each non-presenting student writes ONE positive comment on a slip for the presenting pair (collected at the end).</a:t>
+              <a:t>15 minutes of work + 5 minutes of buffer.</a:t>
             </a:r>
             <a:endParaRPr lang="en-US" sz="1200" dirty="0"/>
           </a:p>
+          <a:p>
+            <a:pPr algn="l" marL="342900" indent="-342900">
+              <a:lnSpc>
+                <a:spcPts val="1620"/>
+              </a:lnSpc>
+              <a:spcAft>
+                <a:spcPts val="300"/>
+              </a:spcAft>
+              <a:buSzPct val="100000"/>
+              <a:buChar char="•"/>
+            </a:pPr>
+            <a:r>
+              <a:rPr lang="en-US" sz="1200" dirty="0">
+                <a:solidFill>
+                  <a:srgbClr val="1C2833"/>
+                </a:solidFill>
+                <a:latin typeface="Arial" pitchFamily="34" charset="0"/>
+                <a:ea typeface="Arial" pitchFamily="34" charset="-122"/>
+                <a:cs typeface="Arial" pitchFamily="34" charset="-120"/>
+              </a:rPr>
+              <a:t>Closed book.</a:t>
+            </a:r>
+            <a:endParaRPr lang="en-US" sz="1200" dirty="0"/>
+          </a:p>
+          <a:p>
+            <a:pPr algn="l" marL="342900" indent="-342900">
+              <a:lnSpc>
+                <a:spcPts val="1620"/>
+              </a:lnSpc>
+              <a:spcAft>
+                <a:spcPts val="300"/>
+              </a:spcAft>
+              <a:buSzPct val="100000"/>
+              <a:buChar char="•"/>
+            </a:pPr>
+            <a:r>
+              <a:rPr lang="en-US" sz="1200" dirty="0">
+                <a:solidFill>
+                  <a:srgbClr val="1C2833"/>
+                </a:solidFill>
+                <a:latin typeface="Arial" pitchFamily="34" charset="0"/>
+                <a:ea typeface="Arial" pitchFamily="34" charset="-122"/>
+                <a:cs typeface="Arial" pitchFamily="34" charset="-120"/>
+              </a:rPr>
+              <a:t>Submit on the way out for the showcase.</a:t>
+            </a:r>
+            <a:endParaRPr lang="en-US" sz="1200" dirty="0"/>
+          </a:p>
         </p:txBody>
       </p:sp>
       <p:sp>
         <p:nvSpPr>
           <p:cNvPr id="5" name="Text 3"/>
-          <p:cNvSpPr/>
-          <p:nvPr/>
-        </p:nvSpPr>
-        <p:spPr>
-          <a:xfrm>
-            <a:off x="406301" y="1586954"/>
-            <a:ext cx="8498026" cy="426541"/>
-          </a:xfrm>
-          <a:prstGeom prst="rect">
-            <a:avLst/>
-          </a:prstGeom>
-          <a:noFill/>
-          <a:ln/>
-        </p:spPr>
-        <p:txBody>
-          <a:bodyPr wrap="square" lIns="0" tIns="0" rIns="0" bIns="0" rtlCol="0" anchor="t"/>
-          <a:lstStyle/>
-          <a:p>
-            <a:pPr algn="l" indent="0" marL="0">
-              <a:lnSpc>
-                <a:spcPts val="1680"/>
-              </a:lnSpc>
-              <a:spcBef>
-                <a:spcPts val="300"/>
-              </a:spcBef>
-              <a:spcAft>
-                <a:spcPts val="300"/>
-              </a:spcAft>
-              <a:buNone/>
-            </a:pPr>
-            <a:r>
-              <a:rPr lang="en-US" sz="1200" dirty="0">
-                <a:solidFill>
-                  <a:srgbClr val="1C2833"/>
-                </a:solidFill>
-                <a:latin typeface="Arial" pitchFamily="34" charset="0"/>
-                <a:ea typeface="Arial" pitchFamily="34" charset="-122"/>
-                <a:cs typeface="Arial" pitchFamily="34" charset="-120"/>
-              </a:rPr>
-              <a:t>If you have more than 8 pairs and 20 minutes is tight, split into two simultaneous showcase clusters (4 pairs each, in different corners), with the teacher rotating between them.</a:t>
-            </a:r>
-            <a:endParaRPr lang="en-US" sz="1200" dirty="0"/>
-          </a:p>
-        </p:txBody>
-      </p:sp>
-      <p:sp>
-        <p:nvSpPr>
-          <p:cNvPr id="6" name="Text 4"/>
           <p:cNvSpPr/>
           <p:nvPr/>
         </p:nvSpPr>
@@ -3819,7 +5216,7 @@
                 <a:ea typeface="Georgia" pitchFamily="34" charset="-122"/>
                 <a:cs typeface="Georgia" pitchFamily="34" charset="-120"/>
               </a:rPr>
-              <a:t>Reflection (5 min)</a:t>
+              <a:t>Showcase (20 min)</a:t>
             </a:r>
             <a:endParaRPr lang="en-US" sz="1800" dirty="0"/>
           </a:p>
@@ -3833,8 +5230,8 @@
         </p:nvSpPr>
         <p:spPr>
           <a:xfrm>
-            <a:off x="406301" y="870942"/>
-            <a:ext cx="8498026" cy="213271"/>
+            <a:off x="634901" y="883593"/>
+            <a:ext cx="8102798" cy="1218902"/>
           </a:xfrm>
           <a:prstGeom prst="rect">
             <a:avLst/>
@@ -3846,54 +5243,6 @@
           <a:bodyPr wrap="square" lIns="0" tIns="0" rIns="0" bIns="0" rtlCol="0" anchor="t"/>
           <a:lstStyle/>
           <a:p>
-            <a:pPr algn="l" indent="0" marL="0">
-              <a:lnSpc>
-                <a:spcPts val="1680"/>
-              </a:lnSpc>
-              <a:spcBef>
-                <a:spcPts val="300"/>
-              </a:spcBef>
-              <a:spcAft>
-                <a:spcPts val="300"/>
-              </a:spcAft>
-              <a:buNone/>
-            </a:pPr>
-            <a:r>
-              <a:rPr lang="en-US" sz="1200" dirty="0">
-                <a:solidFill>
-                  <a:srgbClr val="1C2833"/>
-                </a:solidFill>
-                <a:latin typeface="Arial" pitchFamily="34" charset="0"/>
-                <a:ea typeface="Arial" pitchFamily="34" charset="-122"/>
-                <a:cs typeface="Arial" pitchFamily="34" charset="-120"/>
-              </a:rPr>
-              <a:t>Each student fills the reflection slip:</a:t>
-            </a:r>
-            <a:endParaRPr lang="en-US" sz="1200" dirty="0"/>
-          </a:p>
-        </p:txBody>
-      </p:sp>
-      <p:sp>
-        <p:nvSpPr>
-          <p:cNvPr id="5" name="Text 3"/>
-          <p:cNvSpPr/>
-          <p:nvPr/>
-        </p:nvSpPr>
-        <p:spPr>
-          <a:xfrm>
-            <a:off x="634901" y="1173063"/>
-            <a:ext cx="8102798" cy="769441"/>
-          </a:xfrm>
-          <a:prstGeom prst="rect">
-            <a:avLst/>
-          </a:prstGeom>
-          <a:noFill/>
-          <a:ln/>
-        </p:spPr>
-        <p:txBody>
-          <a:bodyPr wrap="square" lIns="0" tIns="0" rIns="0" bIns="0" rtlCol="0" anchor="t"/>
-          <a:lstStyle/>
-          <a:p>
             <a:pPr algn="l" marL="342900" indent="-342900">
               <a:lnSpc>
                 <a:spcPts val="1620"/>
@@ -3913,7 +5262,47 @@
                 <a:ea typeface="Arial" pitchFamily="34" charset="-122"/>
                 <a:cs typeface="Arial" pitchFamily="34" charset="-120"/>
               </a:rPr>
-              <a:t>What is ONE thing you'll remember about the Sun's movement six months from now?</a:t>
+              <a:t>Pairs present their </a:t>
+            </a:r>
+            <a:pPr algn="l" indent="0" marL="0">
+              <a:lnSpc>
+                <a:spcPts val="1620"/>
+              </a:lnSpc>
+              <a:spcAft>
+                <a:spcPts val="300"/>
+              </a:spcAft>
+              <a:buNone/>
+            </a:pPr>
+            <a:r>
+              <a:rPr lang="en-US" sz="1200" i="1" dirty="0">
+                <a:solidFill>
+                  <a:srgbClr val="1C2833"/>
+                </a:solidFill>
+                <a:latin typeface="Arial" pitchFamily="34" charset="0"/>
+                <a:ea typeface="Arial" pitchFamily="34" charset="-122"/>
+                <a:cs typeface="Arial" pitchFamily="34" charset="-120"/>
+              </a:rPr>
+              <a:t>rāśi</a:t>
+            </a:r>
+            <a:pPr algn="l" indent="0" marL="0">
+              <a:lnSpc>
+                <a:spcPts val="1620"/>
+              </a:lnSpc>
+              <a:spcAft>
+                <a:spcPts val="300"/>
+              </a:spcAft>
+              <a:buNone/>
+            </a:pPr>
+            <a:r>
+              <a:rPr lang="en-US" sz="1200" dirty="0">
+                <a:solidFill>
+                  <a:srgbClr val="1C2833"/>
+                </a:solidFill>
+                <a:latin typeface="Arial" pitchFamily="34" charset="0"/>
+                <a:ea typeface="Arial" pitchFamily="34" charset="-122"/>
+                <a:cs typeface="Arial" pitchFamily="34" charset="-120"/>
+              </a:rPr>
+              <a:t>-wheel.</a:t>
             </a:r>
             <a:endParaRPr lang="en-US" sz="1200" dirty="0"/>
           </a:p>
@@ -3937,7 +5326,7 @@
                 <a:ea typeface="Arial" pitchFamily="34" charset="-122"/>
                 <a:cs typeface="Arial" pitchFamily="34" charset="-120"/>
               </a:rPr>
-              <a:t>What is ONE thing that didn't click for you in this module — that you want to come back to?</a:t>
+              <a:t>3 minutes per pair (strict). 1 minute for Q&amp;A.</a:t>
             </a:r>
             <a:endParaRPr lang="en-US" sz="1200" dirty="0"/>
           </a:p>
@@ -3961,44 +5350,20 @@
                 <a:ea typeface="Arial" pitchFamily="34" charset="-122"/>
                 <a:cs typeface="Arial" pitchFamily="34" charset="-120"/>
               </a:rPr>
-              <a:t>(Optional) Was there a "wait — that's surprising" moment? What was it?</a:t>
+              <a:t>Teacher marks on the rubric during each presentation (5 min slot per pair).</a:t>
             </a:r>
             <a:endParaRPr lang="en-US" sz="1200" dirty="0"/>
           </a:p>
-        </p:txBody>
-      </p:sp>
-      <p:sp>
-        <p:nvSpPr>
-          <p:cNvPr id="6" name="Text 4"/>
-          <p:cNvSpPr/>
-          <p:nvPr/>
-        </p:nvSpPr>
-        <p:spPr>
-          <a:xfrm>
-            <a:off x="406301" y="2031355"/>
-            <a:ext cx="8498026" cy="213271"/>
-          </a:xfrm>
-          <a:prstGeom prst="rect">
-            <a:avLst/>
-          </a:prstGeom>
-          <a:noFill/>
-          <a:ln/>
-        </p:spPr>
-        <p:txBody>
-          <a:bodyPr wrap="square" lIns="0" tIns="0" rIns="0" bIns="0" rtlCol="0" anchor="t"/>
-          <a:lstStyle/>
-          <a:p>
-            <a:pPr algn="l" indent="0" marL="0">
-              <a:lnSpc>
-                <a:spcPts val="1680"/>
-              </a:lnSpc>
-              <a:spcBef>
-                <a:spcPts val="300"/>
-              </a:spcBef>
-              <a:spcAft>
-                <a:spcPts val="300"/>
-              </a:spcAft>
-              <a:buNone/>
+          <a:p>
+            <a:pPr algn="l" marL="342900" indent="-342900">
+              <a:lnSpc>
+                <a:spcPts val="1620"/>
+              </a:lnSpc>
+              <a:spcAft>
+                <a:spcPts val="300"/>
+              </a:spcAft>
+              <a:buSzPct val="100000"/>
+              <a:buChar char="•"/>
             </a:pPr>
             <a:r>
               <a:rPr lang="en-US" sz="1200" dirty="0">
@@ -4009,7 +5374,7 @@
                 <a:ea typeface="Arial" pitchFamily="34" charset="-122"/>
                 <a:cs typeface="Arial" pitchFamily="34" charset="-120"/>
               </a:rPr>
-              <a:t>Submit before leaving.</a:t>
+              <a:t>Audience: the rest of the class. Each non-presenting student writes ONE positive comment on a slip for the presenting pair (collected at the end).</a:t>
             </a:r>
             <a:endParaRPr lang="en-US" sz="1200" dirty="0"/>
           </a:p>
@@ -4017,7 +5382,7 @@
       </p:sp>
       <p:sp>
         <p:nvSpPr>
-          <p:cNvPr id="7" name="Text 5"/>
+          <p:cNvPr id="5" name="Text 3"/>
           <p:cNvSpPr/>
           <p:nvPr/>
         </p:nvSpPr>
@@ -4167,7 +5532,7 @@
                 <a:ea typeface="Georgia" pitchFamily="34" charset="-122"/>
                 <a:cs typeface="Georgia" pitchFamily="34" charset="-120"/>
               </a:rPr>
-              <a:t>What gets graded today</a:t>
+              <a:t>Showcase (20 min) (cont.)</a:t>
             </a:r>
             <a:endParaRPr lang="en-US" sz="1800" dirty="0"/>
           </a:p>
@@ -4182,7 +5547,7 @@
         <p:spPr>
           <a:xfrm>
             <a:off x="406301" y="870942"/>
-            <a:ext cx="8498026" cy="213271"/>
+            <a:ext cx="8498026" cy="426541"/>
           </a:xfrm>
           <a:prstGeom prst="rect">
             <a:avLst/>
@@ -4207,15 +5572,15 @@
               <a:buNone/>
             </a:pPr>
             <a:r>
-              <a:rPr lang="en-US" sz="1200" i="1" dirty="0">
-                <a:solidFill>
-                  <a:srgbClr val="1C2833"/>
-                </a:solidFill>
-                <a:latin typeface="Arial" pitchFamily="34" charset="0"/>
-                <a:ea typeface="Arial" pitchFamily="34" charset="-122"/>
-                <a:cs typeface="Arial" pitchFamily="34" charset="-120"/>
-              </a:rPr>
-              <a:t>Each row: Item · Marks · Where it lives.</a:t>
+              <a:rPr lang="en-US" sz="1200" dirty="0">
+                <a:solidFill>
+                  <a:srgbClr val="1C2833"/>
+                </a:solidFill>
+                <a:latin typeface="Arial" pitchFamily="34" charset="0"/>
+                <a:ea typeface="Arial" pitchFamily="34" charset="-122"/>
+                <a:cs typeface="Arial" pitchFamily="34" charset="-120"/>
+              </a:rPr>
+              <a:t>If you have more than 8 pairs and 20 minutes is tight, split into two simultaneous showcase clusters (4 pairs each, in different corners), with the teacher rotating between them.</a:t>
             </a:r>
             <a:endParaRPr lang="en-US" sz="1200" dirty="0"/>
           </a:p>
@@ -4224,352 +5589,6 @@
       <p:sp>
         <p:nvSpPr>
           <p:cNvPr id="5" name="Text 3"/>
-          <p:cNvSpPr/>
-          <p:nvPr/>
-        </p:nvSpPr>
-        <p:spPr>
-          <a:xfrm>
-            <a:off x="634901" y="1173063"/>
-            <a:ext cx="8102798" cy="1070372"/>
-          </a:xfrm>
-          <a:prstGeom prst="rect">
-            <a:avLst/>
-          </a:prstGeom>
-          <a:noFill/>
-          <a:ln/>
-        </p:spPr>
-        <p:txBody>
-          <a:bodyPr wrap="square" lIns="0" tIns="0" rIns="0" bIns="0" rtlCol="0" anchor="t"/>
-          <a:lstStyle/>
-          <a:p>
-            <a:pPr algn="l" marL="342900" indent="-342900">
-              <a:lnSpc>
-                <a:spcPts val="1620"/>
-              </a:lnSpc>
-              <a:spcAft>
-                <a:spcPts val="300"/>
-              </a:spcAft>
-              <a:buSzPct val="100000"/>
-              <a:buChar char="•"/>
-            </a:pPr>
-            <a:r>
-              <a:rPr lang="en-US" sz="1200" b="1" dirty="0">
-                <a:solidFill>
-                  <a:srgbClr val="1C2833"/>
-                </a:solidFill>
-                <a:latin typeface="Arial" pitchFamily="34" charset="0"/>
-                <a:ea typeface="Arial" pitchFamily="34" charset="-122"/>
-                <a:cs typeface="Arial" pitchFamily="34" charset="-120"/>
-              </a:rPr>
-              <a:t>Summative quiz</a:t>
-            </a:r>
-            <a:pPr algn="l" indent="0" marL="0">
-              <a:lnSpc>
-                <a:spcPts val="1620"/>
-              </a:lnSpc>
-              <a:spcAft>
-                <a:spcPts val="300"/>
-              </a:spcAft>
-              <a:buNone/>
-            </a:pPr>
-            <a:r>
-              <a:rPr lang="en-US" sz="1200" dirty="0">
-                <a:solidFill>
-                  <a:srgbClr val="1C2833"/>
-                </a:solidFill>
-                <a:latin typeface="Arial" pitchFamily="34" charset="0"/>
-                <a:ea typeface="Arial" pitchFamily="34" charset="-122"/>
-                <a:cs typeface="Arial" pitchFamily="34" charset="-120"/>
-              </a:rPr>
-              <a:t> — 25 · </a:t>
-            </a:r>
-            <a:pPr algn="l" indent="0" marL="0">
-              <a:lnSpc>
-                <a:spcPts val="1620"/>
-              </a:lnSpc>
-              <a:spcAft>
-                <a:spcPts val="300"/>
-              </a:spcAft>
-              <a:buNone/>
-            </a:pPr>
-            <a:r>
-              <a:rPr lang="en-US" sz="1200" dirty="0">
-                <a:solidFill>
-                  <a:srgbClr val="1C2833"/>
-                </a:solidFill>
-                <a:latin typeface="Arial" pitchFamily="34" charset="0"/>
-                <a:ea typeface="Arial" pitchFamily="34" charset="-122"/>
-                <a:cs typeface="Arial" pitchFamily="34" charset="-120"/>
-              </a:rPr>
-              <a:t>quizzes/summative.md</a:t>
-            </a:r>
-            <a:endParaRPr lang="en-US" sz="1200" dirty="0"/>
-          </a:p>
-          <a:p>
-            <a:pPr algn="l" marL="342900" indent="-342900">
-              <a:lnSpc>
-                <a:spcPts val="1620"/>
-              </a:lnSpc>
-              <a:spcAft>
-                <a:spcPts val="300"/>
-              </a:spcAft>
-              <a:buSzPct val="100000"/>
-              <a:buChar char="•"/>
-            </a:pPr>
-            <a:r>
-              <a:rPr lang="en-US" sz="1200" b="1" dirty="0">
-                <a:solidFill>
-                  <a:srgbClr val="1C2833"/>
-                </a:solidFill>
-                <a:latin typeface="Arial" pitchFamily="34" charset="0"/>
-                <a:ea typeface="Arial" pitchFamily="34" charset="-122"/>
-                <a:cs typeface="Arial" pitchFamily="34" charset="-120"/>
-              </a:rPr>
-              <a:t>Project artefact</a:t>
-            </a:r>
-            <a:pPr algn="l" indent="0" marL="0">
-              <a:lnSpc>
-                <a:spcPts val="1620"/>
-              </a:lnSpc>
-              <a:spcAft>
-                <a:spcPts val="300"/>
-              </a:spcAft>
-              <a:buNone/>
-            </a:pPr>
-            <a:r>
-              <a:rPr lang="en-US" sz="1200" dirty="0">
-                <a:solidFill>
-                  <a:srgbClr val="1C2833"/>
-                </a:solidFill>
-                <a:latin typeface="Arial" pitchFamily="34" charset="0"/>
-                <a:ea typeface="Arial" pitchFamily="34" charset="-122"/>
-                <a:cs typeface="Arial" pitchFamily="34" charset="-120"/>
-              </a:rPr>
-              <a:t> — 30 · rubric </a:t>
-            </a:r>
-            <a:pPr algn="l" indent="0" marL="0">
-              <a:lnSpc>
-                <a:spcPts val="1620"/>
-              </a:lnSpc>
-              <a:spcAft>
-                <a:spcPts val="300"/>
-              </a:spcAft>
-              <a:buNone/>
-            </a:pPr>
-            <a:r>
-              <a:rPr lang="en-US" sz="1200" dirty="0">
-                <a:solidFill>
-                  <a:srgbClr val="1C2833"/>
-                </a:solidFill>
-                <a:latin typeface="Arial" pitchFamily="34" charset="0"/>
-                <a:ea typeface="Arial" pitchFamily="34" charset="-122"/>
-                <a:cs typeface="Arial" pitchFamily="34" charset="-120"/>
-              </a:rPr>
-              <a:t>assessments/rubric.md</a:t>
-            </a:r>
-            <a:endParaRPr lang="en-US" sz="1200" dirty="0"/>
-          </a:p>
-          <a:p>
-            <a:pPr algn="l" marL="342900" indent="-342900">
-              <a:lnSpc>
-                <a:spcPts val="1620"/>
-              </a:lnSpc>
-              <a:spcAft>
-                <a:spcPts val="300"/>
-              </a:spcAft>
-              <a:buSzPct val="100000"/>
-              <a:buChar char="•"/>
-            </a:pPr>
-            <a:r>
-              <a:rPr lang="en-US" sz="1200" b="1" dirty="0">
-                <a:solidFill>
-                  <a:srgbClr val="1C2833"/>
-                </a:solidFill>
-                <a:latin typeface="Arial" pitchFamily="34" charset="0"/>
-                <a:ea typeface="Arial" pitchFamily="34" charset="-122"/>
-                <a:cs typeface="Arial" pitchFamily="34" charset="-120"/>
-              </a:rPr>
-              <a:t>Presentation (Day 10)</a:t>
-            </a:r>
-            <a:pPr algn="l" indent="0" marL="0">
-              <a:lnSpc>
-                <a:spcPts val="1620"/>
-              </a:lnSpc>
-              <a:spcAft>
-                <a:spcPts val="300"/>
-              </a:spcAft>
-              <a:buNone/>
-            </a:pPr>
-            <a:r>
-              <a:rPr lang="en-US" sz="1200" dirty="0">
-                <a:solidFill>
-                  <a:srgbClr val="1C2833"/>
-                </a:solidFill>
-                <a:latin typeface="Arial" pitchFamily="34" charset="0"/>
-                <a:ea typeface="Arial" pitchFamily="34" charset="-122"/>
-                <a:cs typeface="Arial" pitchFamily="34" charset="-120"/>
-              </a:rPr>
-              <a:t> — 10 · rubric </a:t>
-            </a:r>
-            <a:pPr algn="l" indent="0" marL="0">
-              <a:lnSpc>
-                <a:spcPts val="1620"/>
-              </a:lnSpc>
-              <a:spcAft>
-                <a:spcPts val="300"/>
-              </a:spcAft>
-              <a:buNone/>
-            </a:pPr>
-            <a:r>
-              <a:rPr lang="en-US" sz="1200" dirty="0">
-                <a:solidFill>
-                  <a:srgbClr val="1C2833"/>
-                </a:solidFill>
-                <a:latin typeface="Arial" pitchFamily="34" charset="0"/>
-                <a:ea typeface="Arial" pitchFamily="34" charset="-122"/>
-                <a:cs typeface="Arial" pitchFamily="34" charset="-120"/>
-              </a:rPr>
-              <a:t>assessments/rubric.md</a:t>
-            </a:r>
-            <a:endParaRPr lang="en-US" sz="1200" dirty="0"/>
-          </a:p>
-          <a:p>
-            <a:pPr algn="l" marL="342900" indent="-342900">
-              <a:lnSpc>
-                <a:spcPts val="1620"/>
-              </a:lnSpc>
-              <a:spcAft>
-                <a:spcPts val="300"/>
-              </a:spcAft>
-              <a:buSzPct val="100000"/>
-              <a:buChar char="•"/>
-            </a:pPr>
-            <a:r>
-              <a:rPr lang="en-US" sz="1200" b="1" dirty="0">
-                <a:solidFill>
-                  <a:srgbClr val="1C2833"/>
-                </a:solidFill>
-                <a:latin typeface="Arial" pitchFamily="34" charset="0"/>
-                <a:ea typeface="Arial" pitchFamily="34" charset="-122"/>
-                <a:cs typeface="Arial" pitchFamily="34" charset="-120"/>
-              </a:rPr>
-              <a:t>Total</a:t>
-            </a:r>
-            <a:pPr algn="l" indent="0" marL="0">
-              <a:lnSpc>
-                <a:spcPts val="1620"/>
-              </a:lnSpc>
-              <a:spcAft>
-                <a:spcPts val="300"/>
-              </a:spcAft>
-              <a:buNone/>
-            </a:pPr>
-            <a:r>
-              <a:rPr lang="en-US" sz="1200" dirty="0">
-                <a:solidFill>
-                  <a:srgbClr val="1C2833"/>
-                </a:solidFill>
-                <a:latin typeface="Arial" pitchFamily="34" charset="0"/>
-                <a:ea typeface="Arial" pitchFamily="34" charset="-122"/>
-                <a:cs typeface="Arial" pitchFamily="34" charset="-120"/>
-              </a:rPr>
-              <a:t> — </a:t>
-            </a:r>
-            <a:pPr algn="l" indent="0" marL="0">
-              <a:lnSpc>
-                <a:spcPts val="1620"/>
-              </a:lnSpc>
-              <a:spcAft>
-                <a:spcPts val="300"/>
-              </a:spcAft>
-              <a:buNone/>
-            </a:pPr>
-            <a:r>
-              <a:rPr lang="en-US" sz="1200" b="1" dirty="0">
-                <a:solidFill>
-                  <a:srgbClr val="1C2833"/>
-                </a:solidFill>
-                <a:latin typeface="Arial" pitchFamily="34" charset="0"/>
-                <a:ea typeface="Arial" pitchFamily="34" charset="-122"/>
-                <a:cs typeface="Arial" pitchFamily="34" charset="-120"/>
-              </a:rPr>
-              <a:t>65</a:t>
-            </a:r>
-            <a:pPr algn="l" indent="0" marL="0">
-              <a:lnSpc>
-                <a:spcPts val="1620"/>
-              </a:lnSpc>
-              <a:spcAft>
-                <a:spcPts val="300"/>
-              </a:spcAft>
-              <a:buNone/>
-            </a:pPr>
-            <a:r>
-              <a:rPr lang="en-US" sz="1200" dirty="0">
-                <a:solidFill>
-                  <a:srgbClr val="1C2833"/>
-                </a:solidFill>
-                <a:latin typeface="Arial" pitchFamily="34" charset="0"/>
-                <a:ea typeface="Arial" pitchFamily="34" charset="-122"/>
-                <a:cs typeface="Arial" pitchFamily="34" charset="-120"/>
-              </a:rPr>
-              <a:t> (scaled to 40 for module total — see rubric)</a:t>
-            </a:r>
-            <a:endParaRPr lang="en-US" sz="1200" dirty="0"/>
-          </a:p>
-        </p:txBody>
-      </p:sp>
-      <p:sp>
-        <p:nvSpPr>
-          <p:cNvPr id="6" name="Text 4"/>
-          <p:cNvSpPr/>
-          <p:nvPr/>
-        </p:nvSpPr>
-        <p:spPr>
-          <a:xfrm>
-            <a:off x="406301" y="2332286"/>
-            <a:ext cx="8498026" cy="213271"/>
-          </a:xfrm>
-          <a:prstGeom prst="rect">
-            <a:avLst/>
-          </a:prstGeom>
-          <a:noFill/>
-          <a:ln/>
-        </p:spPr>
-        <p:txBody>
-          <a:bodyPr wrap="square" lIns="0" tIns="0" rIns="0" bIns="0" rtlCol="0" anchor="t"/>
-          <a:lstStyle/>
-          <a:p>
-            <a:pPr algn="l" indent="0" marL="0">
-              <a:lnSpc>
-                <a:spcPts val="1680"/>
-              </a:lnSpc>
-              <a:spcBef>
-                <a:spcPts val="300"/>
-              </a:spcBef>
-              <a:spcAft>
-                <a:spcPts val="300"/>
-              </a:spcAft>
-              <a:buNone/>
-            </a:pPr>
-            <a:r>
-              <a:rPr lang="en-US" sz="1200" dirty="0">
-                <a:solidFill>
-                  <a:srgbClr val="1C2833"/>
-                </a:solidFill>
-                <a:latin typeface="Arial" pitchFamily="34" charset="0"/>
-                <a:ea typeface="Arial" pitchFamily="34" charset="-122"/>
-                <a:cs typeface="Arial" pitchFamily="34" charset="-120"/>
-              </a:rPr>
-              <a:t>Reflection slips are not graded; they inform next module's design.</a:t>
-            </a:r>
-            <a:endParaRPr lang="en-US" sz="1200" dirty="0"/>
-          </a:p>
-        </p:txBody>
-      </p:sp>
-      <p:sp>
-        <p:nvSpPr>
-          <p:cNvPr id="7" name="Text 5"/>
           <p:cNvSpPr/>
           <p:nvPr/>
         </p:nvSpPr>
@@ -4719,7 +5738,7 @@
                 <a:ea typeface="Georgia" pitchFamily="34" charset="-122"/>
                 <a:cs typeface="Georgia" pitchFamily="34" charset="-120"/>
               </a:rPr>
-              <a:t>Teacher notes</a:t>
+              <a:t>Reflection (5 min)</a:t>
             </a:r>
             <a:endParaRPr lang="en-US" sz="1800" dirty="0"/>
           </a:p>
@@ -4734,7 +5753,7 @@
         <p:spPr>
           <a:xfrm>
             <a:off x="406301" y="870942"/>
-            <a:ext cx="8498026" cy="853083"/>
+            <a:ext cx="8498026" cy="213271"/>
           </a:xfrm>
           <a:prstGeom prst="rect">
             <a:avLst/>
@@ -4767,7 +5786,7 @@
                 <a:ea typeface="Arial" pitchFamily="34" charset="-122"/>
                 <a:cs typeface="Arial" pitchFamily="34" charset="-120"/>
               </a:rPr>
-              <a:t>– The 3-minute timer is strict. The discipline of compression is part of the learning. – If a pair runs over, the teacher gently raises a hand at 3 minutes; if they keep going past 3:30, end the presentation politely. – For pairs that struggled — don't grade harshly during the presentation. Mark on substance + clarity, not on stage presence. – Pin all the wheels on the wall after the showcase. Leave them up for a week.</a:t>
+              <a:t>Each student fills the reflection slip:</a:t>
             </a:r>
             <a:endParaRPr lang="en-US" sz="1200" dirty="0"/>
           </a:p>
@@ -4776,6 +5795,100 @@
       <p:sp>
         <p:nvSpPr>
           <p:cNvPr id="5" name="Text 3"/>
+          <p:cNvSpPr/>
+          <p:nvPr/>
+        </p:nvSpPr>
+        <p:spPr>
+          <a:xfrm>
+            <a:off x="634901" y="1173063"/>
+            <a:ext cx="8102798" cy="769441"/>
+          </a:xfrm>
+          <a:prstGeom prst="rect">
+            <a:avLst/>
+          </a:prstGeom>
+          <a:noFill/>
+          <a:ln/>
+        </p:spPr>
+        <p:txBody>
+          <a:bodyPr wrap="square" lIns="0" tIns="0" rIns="0" bIns="0" rtlCol="0" anchor="t"/>
+          <a:lstStyle/>
+          <a:p>
+            <a:pPr algn="l" marL="342900" indent="-342900">
+              <a:lnSpc>
+                <a:spcPts val="1620"/>
+              </a:lnSpc>
+              <a:spcAft>
+                <a:spcPts val="300"/>
+              </a:spcAft>
+              <a:buSzPct val="100000"/>
+              <a:buChar char="•"/>
+            </a:pPr>
+            <a:r>
+              <a:rPr lang="en-US" sz="1200" dirty="0">
+                <a:solidFill>
+                  <a:srgbClr val="1C2833"/>
+                </a:solidFill>
+                <a:latin typeface="Arial" pitchFamily="34" charset="0"/>
+                <a:ea typeface="Arial" pitchFamily="34" charset="-122"/>
+                <a:cs typeface="Arial" pitchFamily="34" charset="-120"/>
+              </a:rPr>
+              <a:t>What is ONE thing you'll remember about the Sun's movement six months from now?</a:t>
+            </a:r>
+            <a:endParaRPr lang="en-US" sz="1200" dirty="0"/>
+          </a:p>
+          <a:p>
+            <a:pPr algn="l" marL="342900" indent="-342900">
+              <a:lnSpc>
+                <a:spcPts val="1620"/>
+              </a:lnSpc>
+              <a:spcAft>
+                <a:spcPts val="300"/>
+              </a:spcAft>
+              <a:buSzPct val="100000"/>
+              <a:buChar char="•"/>
+            </a:pPr>
+            <a:r>
+              <a:rPr lang="en-US" sz="1200" dirty="0">
+                <a:solidFill>
+                  <a:srgbClr val="1C2833"/>
+                </a:solidFill>
+                <a:latin typeface="Arial" pitchFamily="34" charset="0"/>
+                <a:ea typeface="Arial" pitchFamily="34" charset="-122"/>
+                <a:cs typeface="Arial" pitchFamily="34" charset="-120"/>
+              </a:rPr>
+              <a:t>What is ONE thing that didn't click for you in this module — that you want to come back to?</a:t>
+            </a:r>
+            <a:endParaRPr lang="en-US" sz="1200" dirty="0"/>
+          </a:p>
+          <a:p>
+            <a:pPr algn="l" marL="342900" indent="-342900">
+              <a:lnSpc>
+                <a:spcPts val="1620"/>
+              </a:lnSpc>
+              <a:spcAft>
+                <a:spcPts val="300"/>
+              </a:spcAft>
+              <a:buSzPct val="100000"/>
+              <a:buChar char="•"/>
+            </a:pPr>
+            <a:r>
+              <a:rPr lang="en-US" sz="1200" dirty="0">
+                <a:solidFill>
+                  <a:srgbClr val="1C2833"/>
+                </a:solidFill>
+                <a:latin typeface="Arial" pitchFamily="34" charset="0"/>
+                <a:ea typeface="Arial" pitchFamily="34" charset="-122"/>
+                <a:cs typeface="Arial" pitchFamily="34" charset="-120"/>
+              </a:rPr>
+              <a:t>(Optional) Was there a "wait — that's surprising" moment? What was it?</a:t>
+            </a:r>
+            <a:endParaRPr lang="en-US" sz="1200" dirty="0"/>
+          </a:p>
+        </p:txBody>
+      </p:sp>
+      <p:sp>
+        <p:nvSpPr>
+          <p:cNvPr id="6" name="Text 4"/>
           <p:cNvSpPr/>
           <p:nvPr/>
         </p:nvSpPr>
@@ -4925,7 +6038,7 @@
                 <a:ea typeface="Georgia" pitchFamily="34" charset="-122"/>
                 <a:cs typeface="Georgia" pitchFamily="34" charset="-120"/>
               </a:rPr>
-              <a:t>Wrap-up</a:t>
+              <a:t>Reflection (5 min) (cont.)</a:t>
             </a:r>
             <a:endParaRPr lang="en-US" sz="1800" dirty="0"/>
           </a:p>
@@ -4940,7 +6053,7 @@
         <p:spPr>
           <a:xfrm>
             <a:off x="406301" y="870942"/>
-            <a:ext cx="8498026" cy="853083"/>
+            <a:ext cx="8498026" cy="213271"/>
           </a:xfrm>
           <a:prstGeom prst="rect">
             <a:avLst/>
@@ -4973,168 +6086,7 @@
                 <a:ea typeface="Arial" pitchFamily="34" charset="-122"/>
                 <a:cs typeface="Arial" pitchFamily="34" charset="-120"/>
               </a:rPr>
-              <a:t>– 30 seconds, teacher: </a:t>
-            </a:r>
-            <a:pPr algn="l" indent="0" marL="0">
-              <a:lnSpc>
-                <a:spcPts val="1680"/>
-              </a:lnSpc>
-              <a:spcBef>
-                <a:spcPts val="300"/>
-              </a:spcBef>
-              <a:spcAft>
-                <a:spcPts val="300"/>
-              </a:spcAft>
-              <a:buNone/>
-            </a:pPr>
-            <a:r>
-              <a:rPr lang="en-US" sz="1200" i="1" dirty="0">
-                <a:solidFill>
-                  <a:srgbClr val="1C2833"/>
-                </a:solidFill>
-                <a:latin typeface="Arial" pitchFamily="34" charset="0"/>
-                <a:ea typeface="Arial" pitchFamily="34" charset="-122"/>
-                <a:cs typeface="Arial" pitchFamily="34" charset="-120"/>
-              </a:rPr>
-              <a:t>"Two weeks ago, none of you could name the 12</a:t>
-            </a:r>
-            <a:pPr algn="l" indent="0" marL="0">
-              <a:lnSpc>
-                <a:spcPts val="1680"/>
-              </a:lnSpc>
-              <a:spcBef>
-                <a:spcPts val="300"/>
-              </a:spcBef>
-              <a:spcAft>
-                <a:spcPts val="300"/>
-              </a:spcAft>
-              <a:buNone/>
-            </a:pPr>
-            <a:r>
-              <a:rPr lang="en-US" sz="1200" dirty="0">
-                <a:solidFill>
-                  <a:srgbClr val="1C2833"/>
-                </a:solidFill>
-                <a:latin typeface="Arial" pitchFamily="34" charset="0"/>
-                <a:ea typeface="Arial" pitchFamily="34" charset="-122"/>
-                <a:cs typeface="Arial" pitchFamily="34" charset="-120"/>
-              </a:rPr>
-              <a:t>rāśis</a:t>
-            </a:r>
-            <a:pPr algn="l" indent="0" marL="0">
-              <a:lnSpc>
-                <a:spcPts val="1680"/>
-              </a:lnSpc>
-              <a:spcBef>
-                <a:spcPts val="300"/>
-              </a:spcBef>
-              <a:spcAft>
-                <a:spcPts val="300"/>
-              </a:spcAft>
-              <a:buNone/>
-            </a:pPr>
-            <a:r>
-              <a:rPr lang="en-US" sz="1200" i="1" dirty="0">
-                <a:solidFill>
-                  <a:srgbClr val="1C2833"/>
-                </a:solidFill>
-                <a:latin typeface="Arial" pitchFamily="34" charset="0"/>
-                <a:ea typeface="Arial" pitchFamily="34" charset="-122"/>
-                <a:cs typeface="Arial" pitchFamily="34" charset="-120"/>
-              </a:rPr>
-              <a:t>. Today, all of you can — and you understand why </a:t>
-            </a:r>
-            <a:pPr algn="l" indent="0" marL="0">
-              <a:lnSpc>
-                <a:spcPts val="1680"/>
-              </a:lnSpc>
-              <a:spcBef>
-                <a:spcPts val="300"/>
-              </a:spcBef>
-              <a:spcAft>
-                <a:spcPts val="300"/>
-              </a:spcAft>
-              <a:buNone/>
-            </a:pPr>
-            <a:r>
-              <a:rPr lang="en-US" sz="1200" b="1" i="1" dirty="0">
-                <a:solidFill>
-                  <a:srgbClr val="1C2833"/>
-                </a:solidFill>
-                <a:latin typeface="Arial" pitchFamily="34" charset="0"/>
-                <a:ea typeface="Arial" pitchFamily="34" charset="-122"/>
-                <a:cs typeface="Arial" pitchFamily="34" charset="-120"/>
-              </a:rPr>
-              <a:t>Makara Saṁkrānti</a:t>
-            </a:r>
-            <a:pPr algn="l" indent="0" marL="0">
-              <a:lnSpc>
-                <a:spcPts val="1680"/>
-              </a:lnSpc>
-              <a:spcBef>
-                <a:spcPts val="300"/>
-              </a:spcBef>
-              <a:spcAft>
-                <a:spcPts val="300"/>
-              </a:spcAft>
-              <a:buNone/>
-            </a:pPr>
-            <a:r>
-              <a:rPr lang="en-US" sz="1200" i="1" dirty="0">
-                <a:solidFill>
-                  <a:srgbClr val="1C2833"/>
-                </a:solidFill>
-                <a:latin typeface="Arial" pitchFamily="34" charset="0"/>
-                <a:ea typeface="Arial" pitchFamily="34" charset="-122"/>
-                <a:cs typeface="Arial" pitchFamily="34" charset="-120"/>
-              </a:rPr>
-              <a:t> is on January 14 and not December 21. That's astronomical literacy that took the Indian tradition centuries to build. You built it in 10 days. Well done."</a:t>
-            </a:r>
-            <a:pPr algn="l" indent="0" marL="0">
-              <a:lnSpc>
-                <a:spcPts val="1680"/>
-              </a:lnSpc>
-              <a:spcBef>
-                <a:spcPts val="300"/>
-              </a:spcBef>
-              <a:spcAft>
-                <a:spcPts val="300"/>
-              </a:spcAft>
-              <a:buNone/>
-            </a:pPr>
-            <a:r>
-              <a:rPr lang="en-US" sz="1200" dirty="0">
-                <a:solidFill>
-                  <a:srgbClr val="1C2833"/>
-                </a:solidFill>
-                <a:latin typeface="Arial" pitchFamily="34" charset="0"/>
-                <a:ea typeface="Arial" pitchFamily="34" charset="-122"/>
-                <a:cs typeface="Arial" pitchFamily="34" charset="-120"/>
-              </a:rPr>
-              <a:t> – Closing prompt: </a:t>
-            </a:r>
-            <a:pPr algn="l" indent="0" marL="0">
-              <a:lnSpc>
-                <a:spcPts val="1680"/>
-              </a:lnSpc>
-              <a:spcBef>
-                <a:spcPts val="300"/>
-              </a:spcBef>
-              <a:spcAft>
-                <a:spcPts val="300"/>
-              </a:spcAft>
-              <a:buNone/>
-            </a:pPr>
-            <a:r>
-              <a:rPr lang="en-US" sz="1200" i="1" dirty="0">
-                <a:solidFill>
-                  <a:srgbClr val="1C2833"/>
-                </a:solidFill>
-                <a:latin typeface="Arial" pitchFamily="34" charset="0"/>
-                <a:ea typeface="Arial" pitchFamily="34" charset="-122"/>
-                <a:cs typeface="Arial" pitchFamily="34" charset="-120"/>
-              </a:rPr>
-              <a:t>"Tomorrow morning, when you walk to school, notice which way the Sun is rising. You'll find yourself looking for it. That's the habit this module was after."</a:t>
+              <a:t>Submit before leaving.</a:t>
             </a:r>
             <a:endParaRPr lang="en-US" sz="1200" dirty="0"/>
           </a:p>
